--- a/diagrams/compliance/merkle-seal-chain.pptx
+++ b/diagrams/compliance/merkle-seal-chain.pptx
@@ -3149,7 +3149,7 @@
         <p:spPr>
           <a:xfrm>
             <a:off x="822960" y="3108960"/>
-            <a:ext cx="10515600" cy="640080"/>
+            <a:ext cx="10515600" cy="822960"/>
           </a:xfrm>
           <a:prstGeom prst="rect">
             <a:avLst/>
@@ -3164,13 +3164,25 @@
           <a:p>
             <a:pPr algn="l"/>
             <a:r>
-              <a:rPr sz="2000" b="0" i="0">
+              <a:rPr sz="1900" b="0" i="0">
                 <a:solidFill>
                   <a:srgbClr val="9EC9C8"/>
                 </a:solidFill>
                 <a:latin typeface="Avenir Next"/>
               </a:rPr>
-              <a:t>How hashes, links, daily seals, and a signed key registry make evidence tamper-evident</a:t>
+              <a:t>How hashes, links, daily seals, and a signed key registry make evidence tamper-evident —</a:t>
+            </a:r>
+          </a:p>
+          <a:p>
+            <a:pPr algn="l"/>
+            <a:r>
+              <a:rPr sz="1900" b="0" i="0">
+                <a:solidFill>
+                  <a:srgbClr val="9EC9C8"/>
+                </a:solidFill>
+                <a:latin typeface="Avenir Next"/>
+              </a:rPr>
+              <a:t>with the data structures shown at every layer</a:t>
             </a:r>
           </a:p>
         </p:txBody>
@@ -3205,7 +3217,7 @@
                 </a:solidFill>
                 <a:latin typeface="Avenir Next"/>
               </a:rPr>
-              <a:t>Herald.Documentation — diagrams/compliance — chain-of-custody reference (CC8.1 vocabulary)</a:t>
+              <a:t>Herald.Documentation — diagrams/compliance — companion to chain-walk-reconstruction.pptx</a:t>
             </a:r>
           </a:p>
         </p:txBody>
@@ -3244,8 +3256,8 @@
         </p:nvSpPr>
         <p:spPr>
           <a:xfrm>
-            <a:off x="548640" y="320040"/>
-            <a:ext cx="11064240" cy="822960"/>
+            <a:off x="548640" y="274320"/>
+            <a:ext cx="11064240" cy="731520"/>
           </a:xfrm>
           <a:prstGeom prst="rect">
             <a:avLst/>
@@ -3260,7 +3272,7 @@
           <a:p>
             <a:pPr algn="l"/>
             <a:r>
-              <a:rPr sz="3000" b="1" i="0">
+              <a:rPr sz="2800" b="1" i="0">
                 <a:solidFill>
                   <a:srgbClr val="1B2A41"/>
                 </a:solidFill>
@@ -3279,7 +3291,7 @@
         </p:nvSpPr>
         <p:spPr>
           <a:xfrm>
-            <a:off x="548640" y="960120"/>
+            <a:off x="548640" y="868680"/>
             <a:ext cx="11064240" cy="457200"/>
           </a:xfrm>
           <a:prstGeom prst="rect">
@@ -3295,7 +3307,7 @@
           <a:p>
             <a:pPr algn="l"/>
             <a:r>
-              <a:rPr sz="1500" b="0" i="1">
+              <a:rPr sz="1400" b="0" i="1">
                 <a:solidFill>
                   <a:srgbClr val="6B7480"/>
                 </a:solidFill>
@@ -3314,8 +3326,8 @@
         </p:nvSpPr>
         <p:spPr>
           <a:xfrm>
-            <a:off x="822960" y="1737360"/>
-            <a:ext cx="10789920" cy="4206240"/>
+            <a:off x="822960" y="1645920"/>
+            <a:ext cx="10789920" cy="4389120"/>
           </a:xfrm>
           <a:prstGeom prst="rect">
             <a:avLst/>
@@ -3426,7 +3438,7 @@
                 </a:solidFill>
                 <a:latin typeface="Avenir Next"/>
               </a:rPr>
-              <a:t>Narrative dramatization: Herald.Documentation prose/compliance/novel/24-success-bank.md</a:t>
+              <a:t>Companion deck: diagrams/compliance/chain-walk-reconstruction.pptx (the backward walk, same example data)</a:t>
             </a:r>
           </a:p>
           <a:p>
@@ -3438,7 +3450,7 @@
                 </a:solidFill>
                 <a:latin typeface="Avenir Next"/>
               </a:rPr>
-              <a:t>    (Luis's tamper-cascade walk; the examiner's independent re-run)</a:t>
+              <a:t>Narrative dramatization: prose/compliance/novel/24-success-bank.md</a:t>
             </a:r>
           </a:p>
         </p:txBody>
@@ -3477,8 +3489,8 @@
         </p:nvSpPr>
         <p:spPr>
           <a:xfrm>
-            <a:off x="548640" y="320040"/>
-            <a:ext cx="11064240" cy="822960"/>
+            <a:off x="548640" y="274320"/>
+            <a:ext cx="11064240" cy="731520"/>
           </a:xfrm>
           <a:prstGeom prst="rect">
             <a:avLst/>
@@ -3493,7 +3505,7 @@
           <a:p>
             <a:pPr algn="l"/>
             <a:r>
-              <a:rPr sz="3000" b="1" i="0">
+              <a:rPr sz="2800" b="1" i="0">
                 <a:solidFill>
                   <a:srgbClr val="1B2A41"/>
                 </a:solidFill>
@@ -3512,7 +3524,7 @@
         </p:nvSpPr>
         <p:spPr>
           <a:xfrm>
-            <a:off x="548640" y="960120"/>
+            <a:off x="548640" y="868680"/>
             <a:ext cx="11064240" cy="457200"/>
           </a:xfrm>
           <a:prstGeom prst="rect">
@@ -3528,7 +3540,7 @@
           <a:p>
             <a:pPr algn="l"/>
             <a:r>
-              <a:rPr sz="1500" b="0" i="1">
+              <a:rPr sz="1400" b="0" i="1">
                 <a:solidFill>
                   <a:srgbClr val="6B7480"/>
                 </a:solidFill>
@@ -3547,8 +3559,8 @@
         </p:nvSpPr>
         <p:spPr>
           <a:xfrm>
-            <a:off x="731520" y="2011680"/>
-            <a:ext cx="3108960" cy="1371600"/>
+            <a:off x="640080" y="1645920"/>
+            <a:ext cx="4023360" cy="1335024"/>
           </a:xfrm>
           <a:prstGeom prst="roundRect">
             <a:avLst/>
@@ -3581,47 +3593,255 @@
           <a:lstStyle/>
           <a:p>
             <a:pPr algn="ctr"/>
-            <a:r>
-              <a:rPr sz="1300" b="0">
+          </a:p>
+        </p:txBody>
+      </p:sp>
+      <p:sp>
+        <p:nvSpPr>
+          <p:cNvPr id="5" name="Rounded Rectangle 4"/>
+          <p:cNvSpPr/>
+          <p:nvPr/>
+        </p:nvSpPr>
+        <p:spPr>
+          <a:xfrm>
+            <a:off x="640080" y="1645920"/>
+            <a:ext cx="4023360" cy="310896"/>
+          </a:xfrm>
+          <a:prstGeom prst="roundRect">
+            <a:avLst/>
+          </a:prstGeom>
+          <a:solidFill>
+            <a:srgbClr val="1B2A41"/>
+          </a:solidFill>
+          <a:ln w="15875">
+            <a:solidFill>
+              <a:srgbClr val="1B2A41"/>
+            </a:solidFill>
+          </a:ln>
+        </p:spPr>
+        <p:style>
+          <a:lnRef idx="1">
+            <a:schemeClr val="accent1"/>
+          </a:lnRef>
+          <a:fillRef idx="3">
+            <a:schemeClr val="accent1"/>
+          </a:fillRef>
+          <a:effectRef idx="2">
+            <a:schemeClr val="accent1"/>
+          </a:effectRef>
+          <a:fontRef idx="minor">
+            <a:schemeClr val="lt1"/>
+          </a:fontRef>
+        </p:style>
+        <p:txBody>
+          <a:bodyPr rtlCol="0" anchor="ctr" wrap="square"/>
+          <a:lstStyle/>
+          <a:p>
+            <a:pPr algn="ctr"/>
+            <a:r>
+              <a:rPr sz="1150" b="1">
+                <a:solidFill>
+                  <a:srgbClr val="FAF7F0"/>
+                </a:solidFill>
+                <a:latin typeface="Menlo"/>
+              </a:rPr>
+              <a:t>ARTIFACT  LN-2025-088231</a:t>
+            </a:r>
+          </a:p>
+        </p:txBody>
+      </p:sp>
+      <p:sp>
+        <p:nvSpPr>
+          <p:cNvPr id="6" name="TextBox 5"/>
+          <p:cNvSpPr txBox="1"/>
+          <p:nvPr/>
+        </p:nvSpPr>
+        <p:spPr>
+          <a:xfrm>
+            <a:off x="749808" y="1993392"/>
+            <a:ext cx="3840480" cy="237744"/>
+          </a:xfrm>
+          <a:prstGeom prst="rect">
+            <a:avLst/>
+          </a:prstGeom>
+          <a:noFill/>
+        </p:spPr>
+        <p:txBody>
+          <a:bodyPr wrap="square">
+            <a:spAutoFit/>
+          </a:bodyPr>
+          <a:lstStyle/>
+          <a:p>
+            <a:pPr algn="l"/>
+            <a:r>
+              <a:rPr sz="1050" b="0" i="0">
                 <a:solidFill>
                   <a:srgbClr val="1B2A41"/>
                 </a:solidFill>
+                <a:latin typeface="Menlo"/>
+              </a:rPr>
+              <a:t>doc_id   : LN-2025-088231</a:t>
+            </a:r>
+          </a:p>
+        </p:txBody>
+      </p:sp>
+      <p:sp>
+        <p:nvSpPr>
+          <p:cNvPr id="7" name="TextBox 6"/>
+          <p:cNvSpPr txBox="1"/>
+          <p:nvPr/>
+        </p:nvSpPr>
+        <p:spPr>
+          <a:xfrm>
+            <a:off x="749808" y="2231136"/>
+            <a:ext cx="3840480" cy="237744"/>
+          </a:xfrm>
+          <a:prstGeom prst="rect">
+            <a:avLst/>
+          </a:prstGeom>
+          <a:noFill/>
+        </p:spPr>
+        <p:txBody>
+          <a:bodyPr wrap="square">
+            <a:spAutoFit/>
+          </a:bodyPr>
+          <a:lstStyle/>
+          <a:p>
+            <a:pPr algn="l"/>
+            <a:r>
+              <a:rPr sz="1050" b="0" i="0">
+                <a:solidFill>
+                  <a:srgbClr val="1B2A41"/>
+                </a:solidFill>
+                <a:latin typeface="Menlo"/>
+              </a:rPr>
+              <a:t>type     : loan_file</a:t>
+            </a:r>
+          </a:p>
+        </p:txBody>
+      </p:sp>
+      <p:sp>
+        <p:nvSpPr>
+          <p:cNvPr id="8" name="TextBox 7"/>
+          <p:cNvSpPr txBox="1"/>
+          <p:nvPr/>
+        </p:nvSpPr>
+        <p:spPr>
+          <a:xfrm>
+            <a:off x="749808" y="2468880"/>
+            <a:ext cx="3840480" cy="237744"/>
+          </a:xfrm>
+          <a:prstGeom prst="rect">
+            <a:avLst/>
+          </a:prstGeom>
+          <a:noFill/>
+        </p:spPr>
+        <p:txBody>
+          <a:bodyPr wrap="square">
+            <a:spAutoFit/>
+          </a:bodyPr>
+          <a:lstStyle/>
+          <a:p>
+            <a:pPr algn="l"/>
+            <a:r>
+              <a:rPr sz="1050" b="0" i="0">
+                <a:solidFill>
+                  <a:srgbClr val="1B2A41"/>
+                </a:solidFill>
+                <a:latin typeface="Menlo"/>
+              </a:rPr>
+              <a:t>balance  : $214,309.00</a:t>
+            </a:r>
+          </a:p>
+        </p:txBody>
+      </p:sp>
+      <p:sp>
+        <p:nvSpPr>
+          <p:cNvPr id="9" name="TextBox 8"/>
+          <p:cNvSpPr txBox="1"/>
+          <p:nvPr/>
+        </p:nvSpPr>
+        <p:spPr>
+          <a:xfrm>
+            <a:off x="749808" y="2706624"/>
+            <a:ext cx="3840480" cy="237744"/>
+          </a:xfrm>
+          <a:prstGeom prst="rect">
+            <a:avLst/>
+          </a:prstGeom>
+          <a:noFill/>
+        </p:spPr>
+        <p:txBody>
+          <a:bodyPr wrap="square">
+            <a:spAutoFit/>
+          </a:bodyPr>
+          <a:lstStyle/>
+          <a:p>
+            <a:pPr algn="l"/>
+            <a:r>
+              <a:rPr sz="1050" b="0" i="0">
+                <a:solidFill>
+                  <a:srgbClr val="1B2A41"/>
+                </a:solidFill>
+                <a:latin typeface="Menlo"/>
+              </a:rPr>
+              <a:t>bytes    : 1,482,003</a:t>
+            </a:r>
+          </a:p>
+        </p:txBody>
+      </p:sp>
+      <p:sp>
+        <p:nvSpPr>
+          <p:cNvPr id="10" name="TextBox 9"/>
+          <p:cNvSpPr txBox="1"/>
+          <p:nvPr/>
+        </p:nvSpPr>
+        <p:spPr>
+          <a:xfrm>
+            <a:off x="4800600" y="1965960"/>
+            <a:ext cx="1097280" cy="365760"/>
+          </a:xfrm>
+          <a:prstGeom prst="rect">
+            <a:avLst/>
+          </a:prstGeom>
+          <a:noFill/>
+        </p:spPr>
+        <p:txBody>
+          <a:bodyPr wrap="square">
+            <a:spAutoFit/>
+          </a:bodyPr>
+          <a:lstStyle/>
+          <a:p>
+            <a:pPr algn="ctr"/>
+            <a:r>
+              <a:rPr sz="1200" b="1" i="0">
+                <a:solidFill>
+                  <a:srgbClr val="0E7C7B"/>
+                </a:solidFill>
                 <a:latin typeface="Avenir Next"/>
               </a:rPr>
-              <a:t>Loan record #4187</a:t>
-            </a:r>
-          </a:p>
-          <a:p>
-            <a:pPr algn="ctr"/>
-            <a:r>
-              <a:rPr sz="1300" b="0">
-                <a:solidFill>
-                  <a:srgbClr val="1B2A41"/>
-                </a:solidFill>
-                <a:latin typeface="Avenir Next"/>
-              </a:rPr>
-              <a:t>balance: $214,309.00</a:t>
+              <a:t>sha256</a:t>
             </a:r>
           </a:p>
         </p:txBody>
       </p:sp>
       <p:cxnSp>
         <p:nvCxnSpPr>
-          <p:cNvPr id="5" name="Connector 4"/>
+          <p:cNvPr id="11" name="Connector 10"/>
           <p:cNvCxnSpPr/>
           <p:nvPr/>
         </p:nvCxnSpPr>
         <p:spPr>
           <a:xfrm>
-            <a:off x="3931920" y="2697480"/>
-            <a:ext cx="1188720" cy="0"/>
+            <a:off x="4709160" y="2377440"/>
+            <a:ext cx="1097280" cy="0"/>
           </a:xfrm>
           <a:prstGeom prst="line">
             <a:avLst/>
           </a:prstGeom>
-          <a:ln w="22225">
+          <a:ln w="25400">
             <a:solidFill>
-              <a:srgbClr val="1B2A41"/>
+              <a:srgbClr val="0E7C7B"/>
             </a:solidFill>
             <a:tailEnd type="arrow"/>
           </a:ln>
@@ -3643,49 +3863,14 @@
       </p:cxnSp>
       <p:sp>
         <p:nvSpPr>
-          <p:cNvPr id="6" name="TextBox 5"/>
-          <p:cNvSpPr txBox="1"/>
-          <p:nvPr/>
-        </p:nvSpPr>
-        <p:spPr>
-          <a:xfrm>
-            <a:off x="3977639" y="2240280"/>
-            <a:ext cx="1188720" cy="365760"/>
-          </a:xfrm>
-          <a:prstGeom prst="rect">
-            <a:avLst/>
-          </a:prstGeom>
-          <a:noFill/>
-        </p:spPr>
-        <p:txBody>
-          <a:bodyPr wrap="square">
-            <a:spAutoFit/>
-          </a:bodyPr>
-          <a:lstStyle/>
-          <a:p>
-            <a:pPr algn="ctr"/>
-            <a:r>
-              <a:rPr sz="1300" b="1" i="0">
-                <a:solidFill>
-                  <a:srgbClr val="0E7C7B"/>
-                </a:solidFill>
-                <a:latin typeface="Avenir Next"/>
-              </a:rPr>
-              <a:t>hash</a:t>
-            </a:r>
-          </a:p>
-        </p:txBody>
-      </p:sp>
-      <p:sp>
-        <p:nvSpPr>
-          <p:cNvPr id="7" name="Rounded Rectangle 6"/>
+          <p:cNvPr id="12" name="Rounded Rectangle 11"/>
           <p:cNvSpPr/>
           <p:nvPr/>
         </p:nvSpPr>
         <p:spPr>
           <a:xfrm>
-            <a:off x="5212080" y="2286000"/>
-            <a:ext cx="3200400" cy="822960"/>
+            <a:off x="5943600" y="1965960"/>
+            <a:ext cx="3749039" cy="621792"/>
           </a:xfrm>
           <a:prstGeom prst="roundRect">
             <a:avLst/>
@@ -3718,28 +3903,108 @@
           <a:lstStyle/>
           <a:p>
             <a:pPr algn="ctr"/>
-            <a:r>
-              <a:rPr sz="1400" b="1">
-                <a:solidFill>
-                  <a:srgbClr val="1B2A41"/>
+          </a:p>
+        </p:txBody>
+      </p:sp>
+      <p:sp>
+        <p:nvSpPr>
+          <p:cNvPr id="13" name="Rounded Rectangle 12"/>
+          <p:cNvSpPr/>
+          <p:nvPr/>
+        </p:nvSpPr>
+        <p:spPr>
+          <a:xfrm>
+            <a:off x="5943600" y="1965960"/>
+            <a:ext cx="3749039" cy="310896"/>
+          </a:xfrm>
+          <a:prstGeom prst="roundRect">
+            <a:avLst/>
+          </a:prstGeom>
+          <a:solidFill>
+            <a:srgbClr val="1B2A41"/>
+          </a:solidFill>
+          <a:ln w="15875">
+            <a:solidFill>
+              <a:srgbClr val="0E7C7B"/>
+            </a:solidFill>
+          </a:ln>
+        </p:spPr>
+        <p:style>
+          <a:lnRef idx="1">
+            <a:schemeClr val="accent1"/>
+          </a:lnRef>
+          <a:fillRef idx="3">
+            <a:schemeClr val="accent1"/>
+          </a:fillRef>
+          <a:effectRef idx="2">
+            <a:schemeClr val="accent1"/>
+          </a:effectRef>
+          <a:fontRef idx="minor">
+            <a:schemeClr val="lt1"/>
+          </a:fontRef>
+        </p:style>
+        <p:txBody>
+          <a:bodyPr rtlCol="0" anchor="ctr" wrap="square"/>
+          <a:lstStyle/>
+          <a:p>
+            <a:pPr algn="ctr"/>
+            <a:r>
+              <a:rPr sz="1150" b="1">
+                <a:solidFill>
+                  <a:srgbClr val="FAF7F0"/>
                 </a:solidFill>
                 <a:latin typeface="Menlo"/>
               </a:rPr>
-              <a:t>H = 9f2c…a71d</a:t>
-            </a:r>
-          </a:p>
-        </p:txBody>
-      </p:sp>
-      <p:sp>
-        <p:nvSpPr>
-          <p:cNvPr id="8" name="Rounded Rectangle 7"/>
+              <a:t>DIGEST</a:t>
+            </a:r>
+          </a:p>
+        </p:txBody>
+      </p:sp>
+      <p:sp>
+        <p:nvSpPr>
+          <p:cNvPr id="14" name="TextBox 13"/>
+          <p:cNvSpPr txBox="1"/>
+          <p:nvPr/>
+        </p:nvSpPr>
+        <p:spPr>
+          <a:xfrm>
+            <a:off x="6053328" y="2313432"/>
+            <a:ext cx="3566159" cy="237744"/>
+          </a:xfrm>
+          <a:prstGeom prst="rect">
+            <a:avLst/>
+          </a:prstGeom>
+          <a:noFill/>
+        </p:spPr>
+        <p:txBody>
+          <a:bodyPr wrap="square">
+            <a:spAutoFit/>
+          </a:bodyPr>
+          <a:lstStyle/>
+          <a:p>
+            <a:pPr algn="l"/>
+            <a:r>
+              <a:rPr sz="1200" b="0" i="0">
+                <a:solidFill>
+                  <a:srgbClr val="0E7C7B"/>
+                </a:solidFill>
+                <a:latin typeface="Menlo"/>
+              </a:rPr>
+              <a:t>sha256:7c19…e2a4</a:t>
+            </a:r>
+          </a:p>
+        </p:txBody>
+      </p:sp>
+      <p:sp>
+        <p:nvSpPr>
+          <p:cNvPr id="15" name="Rounded Rectangle 14"/>
           <p:cNvSpPr/>
           <p:nvPr/>
         </p:nvSpPr>
         <p:spPr>
           <a:xfrm>
-            <a:off x="731520" y="4023360"/>
-            <a:ext cx="3108960" cy="1371600"/>
+            <a:off x="640080" y="3749039"/>
+            <a:ext cx="4023360" cy="1335024"/>
           </a:xfrm>
           <a:prstGeom prst="roundRect">
             <a:avLst/>
@@ -3772,45 +4037,253 @@
           <a:lstStyle/>
           <a:p>
             <a:pPr algn="ctr"/>
-            <a:r>
-              <a:rPr sz="1300" b="0">
+          </a:p>
+        </p:txBody>
+      </p:sp>
+      <p:sp>
+        <p:nvSpPr>
+          <p:cNvPr id="16" name="Rounded Rectangle 15"/>
+          <p:cNvSpPr/>
+          <p:nvPr/>
+        </p:nvSpPr>
+        <p:spPr>
+          <a:xfrm>
+            <a:off x="640080" y="3749039"/>
+            <a:ext cx="4023360" cy="310896"/>
+          </a:xfrm>
+          <a:prstGeom prst="roundRect">
+            <a:avLst/>
+          </a:prstGeom>
+          <a:solidFill>
+            <a:srgbClr val="1B2A41"/>
+          </a:solidFill>
+          <a:ln w="15875">
+            <a:solidFill>
+              <a:srgbClr val="B32D2D"/>
+            </a:solidFill>
+          </a:ln>
+        </p:spPr>
+        <p:style>
+          <a:lnRef idx="1">
+            <a:schemeClr val="accent1"/>
+          </a:lnRef>
+          <a:fillRef idx="3">
+            <a:schemeClr val="accent1"/>
+          </a:fillRef>
+          <a:effectRef idx="2">
+            <a:schemeClr val="accent1"/>
+          </a:effectRef>
+          <a:fontRef idx="minor">
+            <a:schemeClr val="lt1"/>
+          </a:fontRef>
+        </p:style>
+        <p:txBody>
+          <a:bodyPr rtlCol="0" anchor="ctr" wrap="square"/>
+          <a:lstStyle/>
+          <a:p>
+            <a:pPr algn="ctr"/>
+            <a:r>
+              <a:rPr sz="1150" b="1">
+                <a:solidFill>
+                  <a:srgbClr val="FAF7F0"/>
+                </a:solidFill>
+                <a:latin typeface="Menlo"/>
+              </a:rPr>
+              <a:t>SAME ARTIFACT, ONE DIGIT ALTERED</a:t>
+            </a:r>
+          </a:p>
+        </p:txBody>
+      </p:sp>
+      <p:sp>
+        <p:nvSpPr>
+          <p:cNvPr id="17" name="TextBox 16"/>
+          <p:cNvSpPr txBox="1"/>
+          <p:nvPr/>
+        </p:nvSpPr>
+        <p:spPr>
+          <a:xfrm>
+            <a:off x="749808" y="4096511"/>
+            <a:ext cx="3840480" cy="237744"/>
+          </a:xfrm>
+          <a:prstGeom prst="rect">
+            <a:avLst/>
+          </a:prstGeom>
+          <a:noFill/>
+        </p:spPr>
+        <p:txBody>
+          <a:bodyPr wrap="square">
+            <a:spAutoFit/>
+          </a:bodyPr>
+          <a:lstStyle/>
+          <a:p>
+            <a:pPr algn="l"/>
+            <a:r>
+              <a:rPr sz="1050" b="0" i="0">
                 <a:solidFill>
                   <a:srgbClr val="1B2A41"/>
                 </a:solidFill>
+                <a:latin typeface="Menlo"/>
+              </a:rPr>
+              <a:t>doc_id   : LN-2025-088231</a:t>
+            </a:r>
+          </a:p>
+        </p:txBody>
+      </p:sp>
+      <p:sp>
+        <p:nvSpPr>
+          <p:cNvPr id="18" name="TextBox 17"/>
+          <p:cNvSpPr txBox="1"/>
+          <p:nvPr/>
+        </p:nvSpPr>
+        <p:spPr>
+          <a:xfrm>
+            <a:off x="749808" y="4334255"/>
+            <a:ext cx="3840480" cy="237744"/>
+          </a:xfrm>
+          <a:prstGeom prst="rect">
+            <a:avLst/>
+          </a:prstGeom>
+          <a:noFill/>
+        </p:spPr>
+        <p:txBody>
+          <a:bodyPr wrap="square">
+            <a:spAutoFit/>
+          </a:bodyPr>
+          <a:lstStyle/>
+          <a:p>
+            <a:pPr algn="l"/>
+            <a:r>
+              <a:rPr sz="1050" b="0" i="0">
+                <a:solidFill>
+                  <a:srgbClr val="1B2A41"/>
+                </a:solidFill>
+                <a:latin typeface="Menlo"/>
+              </a:rPr>
+              <a:t>type     : loan_file</a:t>
+            </a:r>
+          </a:p>
+        </p:txBody>
+      </p:sp>
+      <p:sp>
+        <p:nvSpPr>
+          <p:cNvPr id="19" name="TextBox 18"/>
+          <p:cNvSpPr txBox="1"/>
+          <p:nvPr/>
+        </p:nvSpPr>
+        <p:spPr>
+          <a:xfrm>
+            <a:off x="749808" y="4571999"/>
+            <a:ext cx="3840480" cy="237744"/>
+          </a:xfrm>
+          <a:prstGeom prst="rect">
+            <a:avLst/>
+          </a:prstGeom>
+          <a:noFill/>
+        </p:spPr>
+        <p:txBody>
+          <a:bodyPr wrap="square">
+            <a:spAutoFit/>
+          </a:bodyPr>
+          <a:lstStyle/>
+          <a:p>
+            <a:pPr algn="l"/>
+            <a:r>
+              <a:rPr sz="1050" b="0" i="0">
+                <a:solidFill>
+                  <a:srgbClr val="B32D2D"/>
+                </a:solidFill>
+                <a:latin typeface="Menlo"/>
+              </a:rPr>
+              <a:t>balance  : $214,809.00   ◄ 3→8</a:t>
+            </a:r>
+          </a:p>
+        </p:txBody>
+      </p:sp>
+      <p:sp>
+        <p:nvSpPr>
+          <p:cNvPr id="20" name="TextBox 19"/>
+          <p:cNvSpPr txBox="1"/>
+          <p:nvPr/>
+        </p:nvSpPr>
+        <p:spPr>
+          <a:xfrm>
+            <a:off x="749808" y="4809743"/>
+            <a:ext cx="3840480" cy="237744"/>
+          </a:xfrm>
+          <a:prstGeom prst="rect">
+            <a:avLst/>
+          </a:prstGeom>
+          <a:noFill/>
+        </p:spPr>
+        <p:txBody>
+          <a:bodyPr wrap="square">
+            <a:spAutoFit/>
+          </a:bodyPr>
+          <a:lstStyle/>
+          <a:p>
+            <a:pPr algn="l"/>
+            <a:r>
+              <a:rPr sz="1050" b="0" i="0">
+                <a:solidFill>
+                  <a:srgbClr val="1B2A41"/>
+                </a:solidFill>
+                <a:latin typeface="Menlo"/>
+              </a:rPr>
+              <a:t>bytes    : 1,482,003</a:t>
+            </a:r>
+          </a:p>
+        </p:txBody>
+      </p:sp>
+      <p:sp>
+        <p:nvSpPr>
+          <p:cNvPr id="21" name="TextBox 20"/>
+          <p:cNvSpPr txBox="1"/>
+          <p:nvPr/>
+        </p:nvSpPr>
+        <p:spPr>
+          <a:xfrm>
+            <a:off x="4800600" y="4069080"/>
+            <a:ext cx="1097280" cy="365760"/>
+          </a:xfrm>
+          <a:prstGeom prst="rect">
+            <a:avLst/>
+          </a:prstGeom>
+          <a:noFill/>
+        </p:spPr>
+        <p:txBody>
+          <a:bodyPr wrap="square">
+            <a:spAutoFit/>
+          </a:bodyPr>
+          <a:lstStyle/>
+          <a:p>
+            <a:pPr algn="ctr"/>
+            <a:r>
+              <a:rPr sz="1200" b="1" i="0">
+                <a:solidFill>
+                  <a:srgbClr val="B32D2D"/>
+                </a:solidFill>
                 <a:latin typeface="Avenir Next"/>
               </a:rPr>
-              <a:t>Loan record #4187</a:t>
-            </a:r>
-          </a:p>
-          <a:p>
-            <a:pPr algn="ctr"/>
-            <a:r>
-              <a:rPr sz="1300" b="0">
-                <a:solidFill>
-                  <a:srgbClr val="1B2A41"/>
-                </a:solidFill>
-                <a:latin typeface="Avenir Next"/>
-              </a:rPr>
-              <a:t>balance: $214,809.00</a:t>
+              <a:t>sha256</a:t>
             </a:r>
           </a:p>
         </p:txBody>
       </p:sp>
       <p:cxnSp>
         <p:nvCxnSpPr>
-          <p:cNvPr id="9" name="Connector 8"/>
+          <p:cNvPr id="22" name="Connector 21"/>
           <p:cNvCxnSpPr/>
           <p:nvPr/>
         </p:nvCxnSpPr>
         <p:spPr>
           <a:xfrm>
-            <a:off x="3931920" y="4709160"/>
-            <a:ext cx="1188720" cy="0"/>
+            <a:off x="4709160" y="4480560"/>
+            <a:ext cx="1097280" cy="0"/>
           </a:xfrm>
           <a:prstGeom prst="line">
             <a:avLst/>
           </a:prstGeom>
-          <a:ln w="22225">
+          <a:ln w="25400">
             <a:solidFill>
               <a:srgbClr val="B32D2D"/>
             </a:solidFill>
@@ -3834,49 +4307,14 @@
       </p:cxnSp>
       <p:sp>
         <p:nvSpPr>
-          <p:cNvPr id="10" name="TextBox 9"/>
-          <p:cNvSpPr txBox="1"/>
-          <p:nvPr/>
-        </p:nvSpPr>
-        <p:spPr>
-          <a:xfrm>
-            <a:off x="3977639" y="4251960"/>
-            <a:ext cx="1188720" cy="365760"/>
-          </a:xfrm>
-          <a:prstGeom prst="rect">
-            <a:avLst/>
-          </a:prstGeom>
-          <a:noFill/>
-        </p:spPr>
-        <p:txBody>
-          <a:bodyPr wrap="square">
-            <a:spAutoFit/>
-          </a:bodyPr>
-          <a:lstStyle/>
-          <a:p>
-            <a:pPr algn="ctr"/>
-            <a:r>
-              <a:rPr sz="1300" b="1" i="0">
-                <a:solidFill>
-                  <a:srgbClr val="B32D2D"/>
-                </a:solidFill>
-                <a:latin typeface="Avenir Next"/>
-              </a:rPr>
-              <a:t>hash</a:t>
-            </a:r>
-          </a:p>
-        </p:txBody>
-      </p:sp>
-      <p:sp>
-        <p:nvSpPr>
-          <p:cNvPr id="11" name="Rounded Rectangle 10"/>
+          <p:cNvPr id="23" name="Rounded Rectangle 22"/>
           <p:cNvSpPr/>
           <p:nvPr/>
         </p:nvSpPr>
         <p:spPr>
           <a:xfrm>
-            <a:off x="5212080" y="4297680"/>
-            <a:ext cx="3200400" cy="822960"/>
+            <a:off x="5943600" y="4069080"/>
+            <a:ext cx="3749039" cy="621792"/>
           </a:xfrm>
           <a:prstGeom prst="roundRect">
             <a:avLst/>
@@ -3909,28 +4347,73 @@
           <a:lstStyle/>
           <a:p>
             <a:pPr algn="ctr"/>
-            <a:r>
-              <a:rPr sz="1400" b="1">
-                <a:solidFill>
-                  <a:srgbClr val="B32D2D"/>
+          </a:p>
+        </p:txBody>
+      </p:sp>
+      <p:sp>
+        <p:nvSpPr>
+          <p:cNvPr id="24" name="Rounded Rectangle 23"/>
+          <p:cNvSpPr/>
+          <p:nvPr/>
+        </p:nvSpPr>
+        <p:spPr>
+          <a:xfrm>
+            <a:off x="5943600" y="4069080"/>
+            <a:ext cx="3749039" cy="310896"/>
+          </a:xfrm>
+          <a:prstGeom prst="roundRect">
+            <a:avLst/>
+          </a:prstGeom>
+          <a:solidFill>
+            <a:srgbClr val="1B2A41"/>
+          </a:solidFill>
+          <a:ln w="15875">
+            <a:solidFill>
+              <a:srgbClr val="B32D2D"/>
+            </a:solidFill>
+          </a:ln>
+        </p:spPr>
+        <p:style>
+          <a:lnRef idx="1">
+            <a:schemeClr val="accent1"/>
+          </a:lnRef>
+          <a:fillRef idx="3">
+            <a:schemeClr val="accent1"/>
+          </a:fillRef>
+          <a:effectRef idx="2">
+            <a:schemeClr val="accent1"/>
+          </a:effectRef>
+          <a:fontRef idx="minor">
+            <a:schemeClr val="lt1"/>
+          </a:fontRef>
+        </p:style>
+        <p:txBody>
+          <a:bodyPr rtlCol="0" anchor="ctr" wrap="square"/>
+          <a:lstStyle/>
+          <a:p>
+            <a:pPr algn="ctr"/>
+            <a:r>
+              <a:rPr sz="1150" b="1">
+                <a:solidFill>
+                  <a:srgbClr val="FAF7F0"/>
                 </a:solidFill>
                 <a:latin typeface="Menlo"/>
               </a:rPr>
-              <a:t>H = 03be…44c2</a:t>
-            </a:r>
-          </a:p>
-        </p:txBody>
-      </p:sp>
-      <p:sp>
-        <p:nvSpPr>
-          <p:cNvPr id="12" name="TextBox 11"/>
+              <a:t>DIGEST</a:t>
+            </a:r>
+          </a:p>
+        </p:txBody>
+      </p:sp>
+      <p:sp>
+        <p:nvSpPr>
+          <p:cNvPr id="25" name="TextBox 24"/>
           <p:cNvSpPr txBox="1"/>
           <p:nvPr/>
         </p:nvSpPr>
         <p:spPr>
           <a:xfrm>
-            <a:off x="8778240" y="3017520"/>
-            <a:ext cx="2926080" cy="2286000"/>
+            <a:off x="6053328" y="4416552"/>
+            <a:ext cx="3566159" cy="237744"/>
           </a:xfrm>
           <a:prstGeom prst="rect">
             <a:avLst/>
@@ -3945,94 +4428,117 @@
           <a:p>
             <a:pPr algn="l"/>
             <a:r>
-              <a:rPr sz="1300" b="0" i="0">
+              <a:rPr sz="1200" b="0" i="0">
+                <a:solidFill>
+                  <a:srgbClr val="B32D2D"/>
+                </a:solidFill>
+                <a:latin typeface="Menlo"/>
+              </a:rPr>
+              <a:t>sha256:03be…44c2</a:t>
+            </a:r>
+          </a:p>
+        </p:txBody>
+      </p:sp>
+      <p:sp>
+        <p:nvSpPr>
+          <p:cNvPr id="26" name="TextBox 25"/>
+          <p:cNvSpPr txBox="1"/>
+          <p:nvPr/>
+        </p:nvSpPr>
+        <p:spPr>
+          <a:xfrm>
+            <a:off x="9966960" y="2377440"/>
+            <a:ext cx="2103120" cy="3017520"/>
+          </a:xfrm>
+          <a:prstGeom prst="rect">
+            <a:avLst/>
+          </a:prstGeom>
+          <a:noFill/>
+        </p:spPr>
+        <p:txBody>
+          <a:bodyPr wrap="square">
+            <a:spAutoFit/>
+          </a:bodyPr>
+          <a:lstStyle/>
+          <a:p>
+            <a:pPr algn="l"/>
+            <a:r>
+              <a:rPr sz="1250" b="0" i="0">
                 <a:solidFill>
                   <a:srgbClr val="6B7480"/>
                 </a:solidFill>
                 <a:latin typeface="Avenir Next"/>
               </a:rPr>
-              <a:t>One digit changed</a:t>
-            </a:r>
-          </a:p>
-          <a:p>
-            <a:pPr algn="l"/>
-            <a:r>
-              <a:rPr sz="1300" b="0" i="0">
+              <a:t>Every bit of the</a:t>
+            </a:r>
+          </a:p>
+          <a:p>
+            <a:pPr algn="l"/>
+            <a:r>
+              <a:rPr sz="1250" b="0" i="0">
                 <a:solidFill>
                   <a:srgbClr val="6B7480"/>
                 </a:solidFill>
                 <a:latin typeface="Avenir Next"/>
               </a:rPr>
-              <a:t>(3 → 8) —</a:t>
-            </a:r>
-          </a:p>
-          <a:p>
-            <a:pPr algn="l"/>
-            <a:r>
-              <a:rPr sz="1300" b="0" i="0">
+              <a:t>digest moves.</a:t>
+            </a:r>
+          </a:p>
+          <a:p>
+            <a:pPr algn="l"/>
+          </a:p>
+          <a:p>
+            <a:pPr algn="l"/>
+            <a:r>
+              <a:rPr sz="1250" b="0" i="0">
                 <a:solidFill>
                   <a:srgbClr val="6B7480"/>
                 </a:solidFill>
                 <a:latin typeface="Avenir Next"/>
               </a:rPr>
-              <a:t>every bit of the</a:t>
-            </a:r>
-          </a:p>
-          <a:p>
-            <a:pPr algn="l"/>
-            <a:r>
-              <a:rPr sz="1300" b="0" i="0">
+              <a:t>You cannot steer</a:t>
+            </a:r>
+          </a:p>
+          <a:p>
+            <a:pPr algn="l"/>
+            <a:r>
+              <a:rPr sz="1250" b="0" i="0">
                 <a:solidFill>
                   <a:srgbClr val="6B7480"/>
                 </a:solidFill>
                 <a:latin typeface="Avenir Next"/>
               </a:rPr>
-              <a:t>fingerprint moves.</a:t>
-            </a:r>
-          </a:p>
-          <a:p>
-            <a:pPr algn="l"/>
-          </a:p>
-          <a:p>
-            <a:pPr algn="l"/>
-            <a:r>
-              <a:rPr sz="1300" b="0" i="0">
+              <a:t>it, reverse it, or</a:t>
+            </a:r>
+          </a:p>
+          <a:p>
+            <a:pPr algn="l"/>
+            <a:r>
+              <a:rPr sz="1250" b="0" i="0">
                 <a:solidFill>
                   <a:srgbClr val="6B7480"/>
                 </a:solidFill>
                 <a:latin typeface="Avenir Next"/>
               </a:rPr>
-              <a:t>You cannot steer it,</a:t>
-            </a:r>
-          </a:p>
-          <a:p>
-            <a:pPr algn="l"/>
-            <a:r>
-              <a:rPr sz="1300" b="0" i="0">
+              <a:t>find a second</a:t>
+            </a:r>
+          </a:p>
+          <a:p>
+            <a:pPr algn="l"/>
+            <a:r>
+              <a:rPr sz="1250" b="0" i="0">
                 <a:solidFill>
                   <a:srgbClr val="6B7480"/>
                 </a:solidFill>
                 <a:latin typeface="Avenir Next"/>
               </a:rPr>
-              <a:t>reverse it, or find a</a:t>
-            </a:r>
-          </a:p>
-          <a:p>
-            <a:pPr algn="l"/>
-            <a:r>
-              <a:rPr sz="1300" b="0" i="0">
-                <a:solidFill>
-                  <a:srgbClr val="6B7480"/>
-                </a:solidFill>
-                <a:latin typeface="Avenir Next"/>
-              </a:rPr>
-              <a:t>second input that</a:t>
-            </a:r>
-          </a:p>
-          <a:p>
-            <a:pPr algn="l"/>
-            <a:r>
-              <a:rPr sz="1300" b="0" i="0">
+              <a:t>input that</a:t>
+            </a:r>
+          </a:p>
+          <a:p>
+            <a:pPr algn="l"/>
+            <a:r>
+              <a:rPr sz="1250" b="0" i="0">
                 <a:solidFill>
                   <a:srgbClr val="6B7480"/>
                 </a:solidFill>
@@ -4077,8 +4583,8 @@
         </p:nvSpPr>
         <p:spPr>
           <a:xfrm>
-            <a:off x="548640" y="320040"/>
-            <a:ext cx="11064240" cy="822960"/>
+            <a:off x="548640" y="274320"/>
+            <a:ext cx="11064240" cy="731520"/>
           </a:xfrm>
           <a:prstGeom prst="rect">
             <a:avLst/>
@@ -4093,13 +4599,13 @@
           <a:p>
             <a:pPr algn="l"/>
             <a:r>
-              <a:rPr sz="3000" b="1" i="0">
+              <a:rPr sz="2800" b="1" i="0">
                 <a:solidFill>
                   <a:srgbClr val="1B2A41"/>
                 </a:solidFill>
                 <a:latin typeface="Avenir Next"/>
               </a:rPr>
-              <a:t>Building block 2 — the keyed hash (MAC)</a:t>
+              <a:t>Building block 2 — the chain entry and its keyed hash (MAC)</a:t>
             </a:r>
           </a:p>
         </p:txBody>
@@ -4112,7 +4618,7 @@
         </p:nvSpPr>
         <p:spPr>
           <a:xfrm>
-            <a:off x="548640" y="960120"/>
+            <a:off x="548640" y="868680"/>
             <a:ext cx="11064240" cy="457200"/>
           </a:xfrm>
           <a:prstGeom prst="rect">
@@ -4128,13 +4634,13 @@
           <a:p>
             <a:pPr algn="l"/>
             <a:r>
-              <a:rPr sz="1500" b="0" i="1">
+              <a:rPr sz="1400" b="0" i="1">
                 <a:solidFill>
                   <a:srgbClr val="6B7480"/>
                 </a:solidFill>
                 <a:latin typeface="Avenir Next"/>
               </a:rPr>
-              <a:t>Each chain entry is hashed WITH a key — authenticity, not just integrity</a:t>
+              <a:t>The artifact's digest is committed inside an entry, authenticated under a registered key</a:t>
             </a:r>
           </a:p>
         </p:txBody>
@@ -4147,8 +4653,8 @@
         </p:nvSpPr>
         <p:spPr>
           <a:xfrm>
-            <a:off x="731520" y="2194560"/>
-            <a:ext cx="2926080" cy="1554480"/>
+            <a:off x="640080" y="1645920"/>
+            <a:ext cx="5669280" cy="2286000"/>
           </a:xfrm>
           <a:prstGeom prst="roundRect">
             <a:avLst/>
@@ -4181,51 +4687,6 @@
           <a:lstStyle/>
           <a:p>
             <a:pPr algn="ctr"/>
-            <a:r>
-              <a:rPr sz="1200" b="0">
-                <a:solidFill>
-                  <a:srgbClr val="1B2A41"/>
-                </a:solidFill>
-                <a:latin typeface="Avenir Next"/>
-              </a:rPr>
-              <a:t>Entry N</a:t>
-            </a:r>
-          </a:p>
-          <a:p>
-            <a:pPr algn="ctr"/>
-            <a:r>
-              <a:rPr sz="1200" b="0">
-                <a:solidFill>
-                  <a:srgbClr val="1B2A41"/>
-                </a:solidFill>
-                <a:latin typeface="Avenir Next"/>
-              </a:rPr>
-              <a:t>artifact hash</a:t>
-            </a:r>
-          </a:p>
-          <a:p>
-            <a:pPr algn="ctr"/>
-            <a:r>
-              <a:rPr sz="1200" b="0">
-                <a:solidFill>
-                  <a:srgbClr val="1B2A41"/>
-                </a:solidFill>
-                <a:latin typeface="Avenir Next"/>
-              </a:rPr>
-              <a:t>timestamp</a:t>
-            </a:r>
-          </a:p>
-          <a:p>
-            <a:pPr algn="ctr"/>
-            <a:r>
-              <a:rPr sz="1200" b="0">
-                <a:solidFill>
-                  <a:srgbClr val="1B2A41"/>
-                </a:solidFill>
-                <a:latin typeface="Avenir Next"/>
-              </a:rPr>
-              <a:t>attributes</a:t>
-            </a:r>
           </a:p>
         </p:txBody>
       </p:sp>
@@ -4237,8 +4698,342 @@
         </p:nvSpPr>
         <p:spPr>
           <a:xfrm>
-            <a:off x="4206240" y="1828800"/>
-            <a:ext cx="1737360" cy="731520"/>
+            <a:off x="640080" y="1645920"/>
+            <a:ext cx="5669280" cy="310896"/>
+          </a:xfrm>
+          <a:prstGeom prst="roundRect">
+            <a:avLst/>
+          </a:prstGeom>
+          <a:solidFill>
+            <a:srgbClr val="1B2A41"/>
+          </a:solidFill>
+          <a:ln w="15875">
+            <a:solidFill>
+              <a:srgbClr val="1B2A41"/>
+            </a:solidFill>
+          </a:ln>
+        </p:spPr>
+        <p:style>
+          <a:lnRef idx="1">
+            <a:schemeClr val="accent1"/>
+          </a:lnRef>
+          <a:fillRef idx="3">
+            <a:schemeClr val="accent1"/>
+          </a:fillRef>
+          <a:effectRef idx="2">
+            <a:schemeClr val="accent1"/>
+          </a:effectRef>
+          <a:fontRef idx="minor">
+            <a:schemeClr val="lt1"/>
+          </a:fontRef>
+        </p:style>
+        <p:txBody>
+          <a:bodyPr rtlCol="0" anchor="ctr" wrap="square"/>
+          <a:lstStyle/>
+          <a:p>
+            <a:pPr algn="ctr"/>
+            <a:r>
+              <a:rPr sz="1150" b="1">
+                <a:solidFill>
+                  <a:srgbClr val="FAF7F0"/>
+                </a:solidFill>
+                <a:latin typeface="Menlo"/>
+              </a:rPr>
+              <a:t>CHAIN ENTRY  E-2025-05-23-0412</a:t>
+            </a:r>
+          </a:p>
+        </p:txBody>
+      </p:sp>
+      <p:sp>
+        <p:nvSpPr>
+          <p:cNvPr id="6" name="TextBox 5"/>
+          <p:cNvSpPr txBox="1"/>
+          <p:nvPr/>
+        </p:nvSpPr>
+        <p:spPr>
+          <a:xfrm>
+            <a:off x="749808" y="1993392"/>
+            <a:ext cx="5486400" cy="237744"/>
+          </a:xfrm>
+          <a:prstGeom prst="rect">
+            <a:avLst/>
+          </a:prstGeom>
+          <a:noFill/>
+        </p:spPr>
+        <p:txBody>
+          <a:bodyPr wrap="square">
+            <a:spAutoFit/>
+          </a:bodyPr>
+          <a:lstStyle/>
+          <a:p>
+            <a:pPr algn="l"/>
+            <a:r>
+              <a:rPr sz="1050" b="0" i="0">
+                <a:solidFill>
+                  <a:srgbClr val="1B2A41"/>
+                </a:solidFill>
+                <a:latin typeface="Menlo"/>
+              </a:rPr>
+              <a:t>entry_id       : E-2025-05-23-0412</a:t>
+            </a:r>
+          </a:p>
+        </p:txBody>
+      </p:sp>
+      <p:sp>
+        <p:nvSpPr>
+          <p:cNvPr id="7" name="TextBox 6"/>
+          <p:cNvSpPr txBox="1"/>
+          <p:nvPr/>
+        </p:nvSpPr>
+        <p:spPr>
+          <a:xfrm>
+            <a:off x="749808" y="2231136"/>
+            <a:ext cx="5486400" cy="237744"/>
+          </a:xfrm>
+          <a:prstGeom prst="rect">
+            <a:avLst/>
+          </a:prstGeom>
+          <a:noFill/>
+        </p:spPr>
+        <p:txBody>
+          <a:bodyPr wrap="square">
+            <a:spAutoFit/>
+          </a:bodyPr>
+          <a:lstStyle/>
+          <a:p>
+            <a:pPr algn="l"/>
+            <a:r>
+              <a:rPr sz="1050" b="0" i="0">
+                <a:solidFill>
+                  <a:srgbClr val="1B2A41"/>
+                </a:solidFill>
+                <a:latin typeface="Menlo"/>
+              </a:rPr>
+              <a:t>ts             : 2025-05-23T14:07:31Z</a:t>
+            </a:r>
+          </a:p>
+        </p:txBody>
+      </p:sp>
+      <p:sp>
+        <p:nvSpPr>
+          <p:cNvPr id="8" name="TextBox 7"/>
+          <p:cNvSpPr txBox="1"/>
+          <p:nvPr/>
+        </p:nvSpPr>
+        <p:spPr>
+          <a:xfrm>
+            <a:off x="749808" y="2468880"/>
+            <a:ext cx="5486400" cy="237744"/>
+          </a:xfrm>
+          <a:prstGeom prst="rect">
+            <a:avLst/>
+          </a:prstGeom>
+          <a:noFill/>
+        </p:spPr>
+        <p:txBody>
+          <a:bodyPr wrap="square">
+            <a:spAutoFit/>
+          </a:bodyPr>
+          <a:lstStyle/>
+          <a:p>
+            <a:pPr algn="l"/>
+            <a:r>
+              <a:rPr sz="1050" b="0" i="0">
+                <a:solidFill>
+                  <a:srgbClr val="0E7C7B"/>
+                </a:solidFill>
+                <a:latin typeface="Menlo"/>
+              </a:rPr>
+              <a:t>artifact_hash  : sha256:7c19…e2a4   ◄ the loan file</a:t>
+            </a:r>
+          </a:p>
+        </p:txBody>
+      </p:sp>
+      <p:sp>
+        <p:nvSpPr>
+          <p:cNvPr id="9" name="TextBox 8"/>
+          <p:cNvSpPr txBox="1"/>
+          <p:nvPr/>
+        </p:nvSpPr>
+        <p:spPr>
+          <a:xfrm>
+            <a:off x="749808" y="2706624"/>
+            <a:ext cx="5486400" cy="237744"/>
+          </a:xfrm>
+          <a:prstGeom prst="rect">
+            <a:avLst/>
+          </a:prstGeom>
+          <a:noFill/>
+        </p:spPr>
+        <p:txBody>
+          <a:bodyPr wrap="square">
+            <a:spAutoFit/>
+          </a:bodyPr>
+          <a:lstStyle/>
+          <a:p>
+            <a:pPr algn="l"/>
+            <a:r>
+              <a:rPr sz="1050" b="0" i="0">
+                <a:solidFill>
+                  <a:srgbClr val="1B2A41"/>
+                </a:solidFill>
+                <a:latin typeface="Menlo"/>
+              </a:rPr>
+              <a:t>attributes     : audit.artifact.kind=loan_file,</a:t>
+            </a:r>
+          </a:p>
+        </p:txBody>
+      </p:sp>
+      <p:sp>
+        <p:nvSpPr>
+          <p:cNvPr id="10" name="TextBox 9"/>
+          <p:cNvSpPr txBox="1"/>
+          <p:nvPr/>
+        </p:nvSpPr>
+        <p:spPr>
+          <a:xfrm>
+            <a:off x="749808" y="2944368"/>
+            <a:ext cx="5486400" cy="237744"/>
+          </a:xfrm>
+          <a:prstGeom prst="rect">
+            <a:avLst/>
+          </a:prstGeom>
+          <a:noFill/>
+        </p:spPr>
+        <p:txBody>
+          <a:bodyPr wrap="square">
+            <a:spAutoFit/>
+          </a:bodyPr>
+          <a:lstStyle/>
+          <a:p>
+            <a:pPr algn="l"/>
+            <a:r>
+              <a:rPr sz="1050" b="0" i="0">
+                <a:solidFill>
+                  <a:srgbClr val="1B2A41"/>
+                </a:solidFill>
+                <a:latin typeface="Menlo"/>
+              </a:rPr>
+              <a:t>                 audit.actor.id=lending-ops-svc …</a:t>
+            </a:r>
+          </a:p>
+        </p:txBody>
+      </p:sp>
+      <p:sp>
+        <p:nvSpPr>
+          <p:cNvPr id="11" name="TextBox 10"/>
+          <p:cNvSpPr txBox="1"/>
+          <p:nvPr/>
+        </p:nvSpPr>
+        <p:spPr>
+          <a:xfrm>
+            <a:off x="749808" y="3182111"/>
+            <a:ext cx="5486400" cy="237744"/>
+          </a:xfrm>
+          <a:prstGeom prst="rect">
+            <a:avLst/>
+          </a:prstGeom>
+          <a:noFill/>
+        </p:spPr>
+        <p:txBody>
+          <a:bodyPr wrap="square">
+            <a:spAutoFit/>
+          </a:bodyPr>
+          <a:lstStyle/>
+          <a:p>
+            <a:pPr algn="l"/>
+            <a:r>
+              <a:rPr sz="1050" b="0" i="0">
+                <a:solidFill>
+                  <a:srgbClr val="C99A2E"/>
+                </a:solidFill>
+                <a:latin typeface="Menlo"/>
+              </a:rPr>
+              <a:t>prev_entry_mac : 5d81…e903          (next slide)</a:t>
+            </a:r>
+          </a:p>
+        </p:txBody>
+      </p:sp>
+      <p:sp>
+        <p:nvSpPr>
+          <p:cNvPr id="12" name="TextBox 11"/>
+          <p:cNvSpPr txBox="1"/>
+          <p:nvPr/>
+        </p:nvSpPr>
+        <p:spPr>
+          <a:xfrm>
+            <a:off x="749808" y="3419855"/>
+            <a:ext cx="5486400" cy="237744"/>
+          </a:xfrm>
+          <a:prstGeom prst="rect">
+            <a:avLst/>
+          </a:prstGeom>
+          <a:noFill/>
+        </p:spPr>
+        <p:txBody>
+          <a:bodyPr wrap="square">
+            <a:spAutoFit/>
+          </a:bodyPr>
+          <a:lstStyle/>
+          <a:p>
+            <a:pPr algn="l"/>
+            <a:r>
+              <a:rPr sz="1050" b="0" i="0">
+                <a:solidFill>
+                  <a:srgbClr val="1B2A41"/>
+                </a:solidFill>
+                <a:latin typeface="Menlo"/>
+              </a:rPr>
+              <a:t>key_id         : ikm-2025-Q2-07</a:t>
+            </a:r>
+          </a:p>
+        </p:txBody>
+      </p:sp>
+      <p:sp>
+        <p:nvSpPr>
+          <p:cNvPr id="13" name="TextBox 12"/>
+          <p:cNvSpPr txBox="1"/>
+          <p:nvPr/>
+        </p:nvSpPr>
+        <p:spPr>
+          <a:xfrm>
+            <a:off x="749808" y="3657599"/>
+            <a:ext cx="5486400" cy="237744"/>
+          </a:xfrm>
+          <a:prstGeom prst="rect">
+            <a:avLst/>
+          </a:prstGeom>
+          <a:noFill/>
+        </p:spPr>
+        <p:txBody>
+          <a:bodyPr wrap="square">
+            <a:spAutoFit/>
+          </a:bodyPr>
+          <a:lstStyle/>
+          <a:p>
+            <a:pPr algn="l"/>
+            <a:r>
+              <a:rPr sz="1050" b="0" i="0">
+                <a:solidFill>
+                  <a:srgbClr val="0E7C7B"/>
+                </a:solidFill>
+                <a:latin typeface="Menlo"/>
+              </a:rPr>
+              <a:t>mac            : b44a…91c7 = MAC(key, all fields)</a:t>
+            </a:r>
+          </a:p>
+        </p:txBody>
+      </p:sp>
+      <p:sp>
+        <p:nvSpPr>
+          <p:cNvPr id="14" name="Rounded Rectangle 13"/>
+          <p:cNvSpPr/>
+          <p:nvPr/>
+        </p:nvSpPr>
+        <p:spPr>
+          <a:xfrm>
+            <a:off x="6766560" y="2103120"/>
+            <a:ext cx="2377440" cy="859536"/>
           </a:xfrm>
           <a:prstGeom prst="roundRect">
             <a:avLst/>
@@ -4271,35 +5066,150 @@
           <a:lstStyle/>
           <a:p>
             <a:pPr algn="ctr"/>
-            <a:r>
-              <a:rPr sz="1200" b="1">
+          </a:p>
+        </p:txBody>
+      </p:sp>
+      <p:sp>
+        <p:nvSpPr>
+          <p:cNvPr id="15" name="Rounded Rectangle 14"/>
+          <p:cNvSpPr/>
+          <p:nvPr/>
+        </p:nvSpPr>
+        <p:spPr>
+          <a:xfrm>
+            <a:off x="6766560" y="2103120"/>
+            <a:ext cx="2377440" cy="310896"/>
+          </a:xfrm>
+          <a:prstGeom prst="roundRect">
+            <a:avLst/>
+          </a:prstGeom>
+          <a:solidFill>
+            <a:srgbClr val="1B2A41"/>
+          </a:solidFill>
+          <a:ln w="15875">
+            <a:solidFill>
+              <a:srgbClr val="0E7C7B"/>
+            </a:solidFill>
+          </a:ln>
+        </p:spPr>
+        <p:style>
+          <a:lnRef idx="1">
+            <a:schemeClr val="accent1"/>
+          </a:lnRef>
+          <a:fillRef idx="3">
+            <a:schemeClr val="accent1"/>
+          </a:fillRef>
+          <a:effectRef idx="2">
+            <a:schemeClr val="accent1"/>
+          </a:effectRef>
+          <a:fontRef idx="minor">
+            <a:schemeClr val="lt1"/>
+          </a:fontRef>
+        </p:style>
+        <p:txBody>
+          <a:bodyPr rtlCol="0" anchor="ctr" wrap="square"/>
+          <a:lstStyle/>
+          <a:p>
+            <a:pPr algn="ctr"/>
+            <a:r>
+              <a:rPr sz="1150" b="1">
+                <a:solidFill>
+                  <a:srgbClr val="FAF7F0"/>
+                </a:solidFill>
+                <a:latin typeface="Menlo"/>
+              </a:rPr>
+              <a:t>KEY  ikm-2025-Q2-07</a:t>
+            </a:r>
+          </a:p>
+        </p:txBody>
+      </p:sp>
+      <p:sp>
+        <p:nvSpPr>
+          <p:cNvPr id="16" name="TextBox 15"/>
+          <p:cNvSpPr txBox="1"/>
+          <p:nvPr/>
+        </p:nvSpPr>
+        <p:spPr>
+          <a:xfrm>
+            <a:off x="6876288" y="2450591"/>
+            <a:ext cx="2194560" cy="237744"/>
+          </a:xfrm>
+          <a:prstGeom prst="rect">
+            <a:avLst/>
+          </a:prstGeom>
+          <a:noFill/>
+        </p:spPr>
+        <p:txBody>
+          <a:bodyPr wrap="square">
+            <a:spAutoFit/>
+          </a:bodyPr>
+          <a:lstStyle/>
+          <a:p>
+            <a:pPr algn="l"/>
+            <a:r>
+              <a:rPr sz="1000" b="0" i="0">
                 <a:solidFill>
                   <a:srgbClr val="1B2A41"/>
                 </a:solidFill>
-                <a:latin typeface="Avenir Next"/>
-              </a:rPr>
-              <a:t>key (IKM)</a:t>
+                <a:latin typeface="Menlo"/>
+              </a:rPr>
+              <a:t>from IKM registry</a:t>
+            </a:r>
+          </a:p>
+        </p:txBody>
+      </p:sp>
+      <p:sp>
+        <p:nvSpPr>
+          <p:cNvPr id="17" name="TextBox 16"/>
+          <p:cNvSpPr txBox="1"/>
+          <p:nvPr/>
+        </p:nvSpPr>
+        <p:spPr>
+          <a:xfrm>
+            <a:off x="6876288" y="2688335"/>
+            <a:ext cx="2194560" cy="237744"/>
+          </a:xfrm>
+          <a:prstGeom prst="rect">
+            <a:avLst/>
+          </a:prstGeom>
+          <a:noFill/>
+        </p:spPr>
+        <p:txBody>
+          <a:bodyPr wrap="square">
+            <a:spAutoFit/>
+          </a:bodyPr>
+          <a:lstStyle/>
+          <a:p>
+            <a:pPr algn="l"/>
+            <a:r>
+              <a:rPr sz="1000" b="0" i="0">
+                <a:solidFill>
+                  <a:srgbClr val="1B2A41"/>
+                </a:solidFill>
+                <a:latin typeface="Menlo"/>
+              </a:rPr>
+              <a:t>window: Q2 2025</a:t>
             </a:r>
           </a:p>
         </p:txBody>
       </p:sp>
       <p:cxnSp>
         <p:nvCxnSpPr>
-          <p:cNvPr id="6" name="Connector 5"/>
+          <p:cNvPr id="18" name="Connector 17"/>
           <p:cNvCxnSpPr/>
           <p:nvPr/>
         </p:nvCxnSpPr>
         <p:spPr>
-          <a:xfrm>
-            <a:off x="3657600" y="2971800"/>
-            <a:ext cx="2651760" cy="0"/>
+          <a:xfrm flipH="1">
+            <a:off x="6309360" y="2743200"/>
+            <a:ext cx="457200" cy="365760"/>
           </a:xfrm>
           <a:prstGeom prst="line">
             <a:avLst/>
           </a:prstGeom>
-          <a:ln w="22225">
+          <a:ln w="25400">
             <a:solidFill>
-              <a:srgbClr val="1B2A41"/>
+              <a:srgbClr val="0E7C7B"/>
             </a:solidFill>
             <a:tailEnd type="arrow"/>
           </a:ln>
@@ -4319,106 +5229,16 @@
           </a:fontRef>
         </p:style>
       </p:cxnSp>
-      <p:cxnSp>
-        <p:nvCxnSpPr>
-          <p:cNvPr id="7" name="Connector 6"/>
-          <p:cNvCxnSpPr/>
-          <p:nvPr/>
-        </p:nvCxnSpPr>
-        <p:spPr>
-          <a:xfrm>
-            <a:off x="5074920" y="2560320"/>
-            <a:ext cx="1234440" cy="320040"/>
-          </a:xfrm>
-          <a:prstGeom prst="line">
-            <a:avLst/>
-          </a:prstGeom>
-          <a:ln w="22225">
-            <a:solidFill>
-              <a:srgbClr val="0E7C7B"/>
-            </a:solidFill>
-            <a:tailEnd type="arrow"/>
-          </a:ln>
-        </p:spPr>
-        <p:style>
-          <a:lnRef idx="2">
-            <a:schemeClr val="accent1"/>
-          </a:lnRef>
-          <a:fillRef idx="0">
-            <a:schemeClr val="accent1"/>
-          </a:fillRef>
-          <a:effectRef idx="1">
-            <a:schemeClr val="accent1"/>
-          </a:effectRef>
-          <a:fontRef idx="minor">
-            <a:schemeClr val="tx1"/>
-          </a:fontRef>
-        </p:style>
-      </p:cxnSp>
-      <p:sp>
-        <p:nvSpPr>
-          <p:cNvPr id="8" name="Rounded Rectangle 7"/>
-          <p:cNvSpPr/>
-          <p:nvPr/>
-        </p:nvSpPr>
-        <p:spPr>
-          <a:xfrm>
-            <a:off x="6400800" y="2560320"/>
-            <a:ext cx="3017520" cy="822960"/>
-          </a:xfrm>
-          <a:prstGeom prst="roundRect">
-            <a:avLst/>
-          </a:prstGeom>
-          <a:solidFill>
-            <a:srgbClr val="E7EEF2"/>
-          </a:solidFill>
-          <a:ln w="15875">
-            <a:solidFill>
-              <a:srgbClr val="0E7C7B"/>
-            </a:solidFill>
-          </a:ln>
-        </p:spPr>
-        <p:style>
-          <a:lnRef idx="1">
-            <a:schemeClr val="accent1"/>
-          </a:lnRef>
-          <a:fillRef idx="3">
-            <a:schemeClr val="accent1"/>
-          </a:fillRef>
-          <a:effectRef idx="2">
-            <a:schemeClr val="accent1"/>
-          </a:effectRef>
-          <a:fontRef idx="minor">
-            <a:schemeClr val="lt1"/>
-          </a:fontRef>
-        </p:style>
-        <p:txBody>
-          <a:bodyPr rtlCol="0" anchor="ctr" wrap="square"/>
-          <a:lstStyle/>
-          <a:p>
-            <a:pPr algn="ctr"/>
-            <a:r>
-              <a:rPr sz="1400" b="1">
-                <a:solidFill>
-                  <a:srgbClr val="1B2A41"/>
-                </a:solidFill>
-                <a:latin typeface="Menlo"/>
-              </a:rPr>
-              <a:t>MAC = 5d81…e903</a:t>
-            </a:r>
-          </a:p>
-        </p:txBody>
-      </p:sp>
-      <p:sp>
-        <p:nvSpPr>
-          <p:cNvPr id="9" name="TextBox 8"/>
+      <p:sp>
+        <p:nvSpPr>
+          <p:cNvPr id="19" name="TextBox 18"/>
           <p:cNvSpPr txBox="1"/>
           <p:nvPr/>
         </p:nvSpPr>
         <p:spPr>
           <a:xfrm>
-            <a:off x="731520" y="4297680"/>
-            <a:ext cx="10881360" cy="1645920"/>
+            <a:off x="6766560" y="4023360"/>
+            <a:ext cx="4846320" cy="2011680"/>
           </a:xfrm>
           <a:prstGeom prst="rect">
             <a:avLst/>
@@ -4433,37 +5253,52 @@
           <a:p>
             <a:pPr algn="l"/>
             <a:r>
-              <a:rPr sz="1500" b="0" i="0">
+              <a:rPr sz="1350" b="0" i="0">
                 <a:solidFill>
                   <a:srgbClr val="1B2A41"/>
                 </a:solidFill>
                 <a:latin typeface="Avenir Next"/>
               </a:rPr>
-              <a:t>A plain hash proves the bytes are intact. A keyed hash (MAC) proves the bytes are intact AND were</a:t>
-            </a:r>
-          </a:p>
-          <a:p>
-            <a:pPr algn="l"/>
-            <a:r>
-              <a:rPr sz="1500" b="0" i="0">
+              <a:t>A plain hash proves the bytes are intact.</a:t>
+            </a:r>
+          </a:p>
+          <a:p>
+            <a:pPr algn="l"/>
+            <a:r>
+              <a:rPr sz="1350" b="0" i="0">
                 <a:solidFill>
                   <a:srgbClr val="1B2A41"/>
                 </a:solidFill>
                 <a:latin typeface="Avenir Next"/>
               </a:rPr>
-              <a:t>committed by something holding the key. Keys live in a registry; the registry's own integrity is the</a:t>
-            </a:r>
-          </a:p>
-          <a:p>
-            <a:pPr algn="l"/>
-            <a:r>
-              <a:rPr sz="1500" b="0" i="0">
+              <a:t>A keyed hash (MAC) proves intact AND</a:t>
+            </a:r>
+          </a:p>
+          <a:p>
+            <a:pPr algn="l"/>
+            <a:r>
+              <a:rPr sz="1350" b="0" i="0">
                 <a:solidFill>
                   <a:srgbClr val="1B2A41"/>
                 </a:solidFill>
                 <a:latin typeface="Avenir Next"/>
               </a:rPr>
-              <a:t>manifest's job (slide 6). One MAC per event — this is the per-event layer.</a:t>
+              <a:t>committed by something holding the key.</a:t>
+            </a:r>
+          </a:p>
+          <a:p>
+            <a:pPr algn="l"/>
+          </a:p>
+          <a:p>
+            <a:pPr algn="l"/>
+            <a:r>
+              <a:rPr sz="1350" b="0" i="0">
+                <a:solidFill>
+                  <a:srgbClr val="1B2A41"/>
+                </a:solidFill>
+                <a:latin typeface="Avenir Next"/>
+              </a:rPr>
+              <a:t>One MAC per event — the per-event layer.</a:t>
             </a:r>
           </a:p>
         </p:txBody>
@@ -4502,8 +5337,8 @@
         </p:nvSpPr>
         <p:spPr>
           <a:xfrm>
-            <a:off x="548640" y="320040"/>
-            <a:ext cx="11064240" cy="822960"/>
+            <a:off x="548640" y="274320"/>
+            <a:ext cx="11064240" cy="731520"/>
           </a:xfrm>
           <a:prstGeom prst="rect">
             <a:avLst/>
@@ -4518,7 +5353,7 @@
           <a:p>
             <a:pPr algn="l"/>
             <a:r>
-              <a:rPr sz="3000" b="1" i="0">
+              <a:rPr sz="2800" b="1" i="0">
                 <a:solidFill>
                   <a:srgbClr val="1B2A41"/>
                 </a:solidFill>
@@ -4537,7 +5372,7 @@
         </p:nvSpPr>
         <p:spPr>
           <a:xfrm>
-            <a:off x="548640" y="960120"/>
+            <a:off x="548640" y="868680"/>
             <a:ext cx="11064240" cy="457200"/>
           </a:xfrm>
           <a:prstGeom prst="rect">
@@ -4553,13 +5388,13 @@
           <a:p>
             <a:pPr algn="l"/>
             <a:r>
-              <a:rPr sz="1500" b="0" i="1">
+              <a:rPr sz="1400" b="0" i="1">
                 <a:solidFill>
                   <a:srgbClr val="6B7480"/>
                 </a:solidFill>
                 <a:latin typeface="Avenir Next"/>
               </a:rPr>
-              <a:t>Every entry binds the previous entry's hash: order becomes provable</a:t>
+              <a:t>Every entry binds the previous entry's MAC: order becomes provable</a:t>
             </a:r>
           </a:p>
         </p:txBody>
@@ -4572,8 +5407,8 @@
         </p:nvSpPr>
         <p:spPr>
           <a:xfrm>
-            <a:off x="640080" y="2377440"/>
-            <a:ext cx="2286000" cy="1554480"/>
+            <a:off x="411480" y="1828800"/>
+            <a:ext cx="3657600" cy="1335024"/>
           </a:xfrm>
           <a:prstGeom prst="roundRect">
             <a:avLst/>
@@ -4606,39 +5441,6 @@
           <a:lstStyle/>
           <a:p>
             <a:pPr algn="ctr"/>
-            <a:r>
-              <a:rPr sz="1200" b="0">
-                <a:solidFill>
-                  <a:srgbClr val="1B2A41"/>
-                </a:solidFill>
-                <a:latin typeface="Avenir Next"/>
-              </a:rPr>
-              <a:t>Entry 1</a:t>
-            </a:r>
-          </a:p>
-          <a:p>
-            <a:pPr algn="ctr"/>
-            <a:r>
-              <a:rPr sz="1200" b="0">
-                <a:solidFill>
-                  <a:srgbClr val="1B2A41"/>
-                </a:solidFill>
-                <a:latin typeface="Avenir Next"/>
-              </a:rPr>
-              <a:t>prev: —</a:t>
-            </a:r>
-          </a:p>
-          <a:p>
-            <a:pPr algn="ctr"/>
-            <a:r>
-              <a:rPr sz="1200" b="0">
-                <a:solidFill>
-                  <a:srgbClr val="1B2A41"/>
-                </a:solidFill>
-                <a:latin typeface="Menlo"/>
-              </a:rPr>
-              <a:t>H1 = 9f2c…</a:t>
-            </a:r>
           </a:p>
         </p:txBody>
       </p:sp>
@@ -4650,8 +5452,202 @@
         </p:nvSpPr>
         <p:spPr>
           <a:xfrm>
-            <a:off x="3520440" y="2377440"/>
-            <a:ext cx="2286000" cy="1554480"/>
+            <a:off x="411480" y="1828800"/>
+            <a:ext cx="3657600" cy="310896"/>
+          </a:xfrm>
+          <a:prstGeom prst="roundRect">
+            <a:avLst/>
+          </a:prstGeom>
+          <a:solidFill>
+            <a:srgbClr val="1B2A41"/>
+          </a:solidFill>
+          <a:ln w="15875">
+            <a:solidFill>
+              <a:srgbClr val="1B2A41"/>
+            </a:solidFill>
+          </a:ln>
+        </p:spPr>
+        <p:style>
+          <a:lnRef idx="1">
+            <a:schemeClr val="accent1"/>
+          </a:lnRef>
+          <a:fillRef idx="3">
+            <a:schemeClr val="accent1"/>
+          </a:fillRef>
+          <a:effectRef idx="2">
+            <a:schemeClr val="accent1"/>
+          </a:effectRef>
+          <a:fontRef idx="minor">
+            <a:schemeClr val="lt1"/>
+          </a:fontRef>
+        </p:style>
+        <p:txBody>
+          <a:bodyPr rtlCol="0" anchor="ctr" wrap="square"/>
+          <a:lstStyle/>
+          <a:p>
+            <a:pPr algn="ctr"/>
+            <a:r>
+              <a:rPr sz="1150" b="1">
+                <a:solidFill>
+                  <a:srgbClr val="FAF7F0"/>
+                </a:solidFill>
+                <a:latin typeface="Menlo"/>
+              </a:rPr>
+              <a:t>E-2025-05-23-0410</a:t>
+            </a:r>
+          </a:p>
+        </p:txBody>
+      </p:sp>
+      <p:sp>
+        <p:nvSpPr>
+          <p:cNvPr id="6" name="TextBox 5"/>
+          <p:cNvSpPr txBox="1"/>
+          <p:nvPr/>
+        </p:nvSpPr>
+        <p:spPr>
+          <a:xfrm>
+            <a:off x="521208" y="2176272"/>
+            <a:ext cx="3474720" cy="237744"/>
+          </a:xfrm>
+          <a:prstGeom prst="rect">
+            <a:avLst/>
+          </a:prstGeom>
+          <a:noFill/>
+        </p:spPr>
+        <p:txBody>
+          <a:bodyPr wrap="square">
+            <a:spAutoFit/>
+          </a:bodyPr>
+          <a:lstStyle/>
+          <a:p>
+            <a:pPr algn="l"/>
+            <a:r>
+              <a:rPr sz="1000" b="0" i="0">
+                <a:solidFill>
+                  <a:srgbClr val="1B2A41"/>
+                </a:solidFill>
+                <a:latin typeface="Menlo"/>
+              </a:rPr>
+              <a:t>artifact: sha256:90cd…77e8</a:t>
+            </a:r>
+          </a:p>
+        </p:txBody>
+      </p:sp>
+      <p:sp>
+        <p:nvSpPr>
+          <p:cNvPr id="7" name="TextBox 6"/>
+          <p:cNvSpPr txBox="1"/>
+          <p:nvPr/>
+        </p:nvSpPr>
+        <p:spPr>
+          <a:xfrm>
+            <a:off x="521208" y="2414015"/>
+            <a:ext cx="3474720" cy="237744"/>
+          </a:xfrm>
+          <a:prstGeom prst="rect">
+            <a:avLst/>
+          </a:prstGeom>
+          <a:noFill/>
+        </p:spPr>
+        <p:txBody>
+          <a:bodyPr wrap="square">
+            <a:spAutoFit/>
+          </a:bodyPr>
+          <a:lstStyle/>
+          <a:p>
+            <a:pPr algn="l"/>
+            <a:r>
+              <a:rPr sz="1000" b="0" i="0">
+                <a:solidFill>
+                  <a:srgbClr val="1B2A41"/>
+                </a:solidFill>
+                <a:latin typeface="Menlo"/>
+              </a:rPr>
+              <a:t>prev    : c1a9…04f2</a:t>
+            </a:r>
+          </a:p>
+        </p:txBody>
+      </p:sp>
+      <p:sp>
+        <p:nvSpPr>
+          <p:cNvPr id="8" name="TextBox 7"/>
+          <p:cNvSpPr txBox="1"/>
+          <p:nvPr/>
+        </p:nvSpPr>
+        <p:spPr>
+          <a:xfrm>
+            <a:off x="521208" y="2651759"/>
+            <a:ext cx="3474720" cy="237744"/>
+          </a:xfrm>
+          <a:prstGeom prst="rect">
+            <a:avLst/>
+          </a:prstGeom>
+          <a:noFill/>
+        </p:spPr>
+        <p:txBody>
+          <a:bodyPr wrap="square">
+            <a:spAutoFit/>
+          </a:bodyPr>
+          <a:lstStyle/>
+          <a:p>
+            <a:pPr algn="l"/>
+            <a:r>
+              <a:rPr sz="1000" b="0" i="0">
+                <a:solidFill>
+                  <a:srgbClr val="1B2A41"/>
+                </a:solidFill>
+                <a:latin typeface="Menlo"/>
+              </a:rPr>
+              <a:t>key_id  : ikm-2025-Q2-07</a:t>
+            </a:r>
+          </a:p>
+        </p:txBody>
+      </p:sp>
+      <p:sp>
+        <p:nvSpPr>
+          <p:cNvPr id="9" name="TextBox 8"/>
+          <p:cNvSpPr txBox="1"/>
+          <p:nvPr/>
+        </p:nvSpPr>
+        <p:spPr>
+          <a:xfrm>
+            <a:off x="521208" y="2889503"/>
+            <a:ext cx="3474720" cy="237744"/>
+          </a:xfrm>
+          <a:prstGeom prst="rect">
+            <a:avLst/>
+          </a:prstGeom>
+          <a:noFill/>
+        </p:spPr>
+        <p:txBody>
+          <a:bodyPr wrap="square">
+            <a:spAutoFit/>
+          </a:bodyPr>
+          <a:lstStyle/>
+          <a:p>
+            <a:pPr algn="l"/>
+            <a:r>
+              <a:rPr sz="1000" b="0" i="0">
+                <a:solidFill>
+                  <a:srgbClr val="C99A2E"/>
+                </a:solidFill>
+                <a:latin typeface="Menlo"/>
+              </a:rPr>
+              <a:t>mac     : 27f0…6c11 ──┐</a:t>
+            </a:r>
+          </a:p>
+        </p:txBody>
+      </p:sp>
+      <p:sp>
+        <p:nvSpPr>
+          <p:cNvPr id="10" name="Rounded Rectangle 9"/>
+          <p:cNvSpPr/>
+          <p:nvPr/>
+        </p:nvSpPr>
+        <p:spPr>
+          <a:xfrm>
+            <a:off x="4343400" y="1828800"/>
+            <a:ext cx="3657600" cy="1335024"/>
           </a:xfrm>
           <a:prstGeom prst="roundRect">
             <a:avLst/>
@@ -4684,52 +5680,213 @@
           <a:lstStyle/>
           <a:p>
             <a:pPr algn="ctr"/>
-            <a:r>
-              <a:rPr sz="1200" b="0">
+          </a:p>
+        </p:txBody>
+      </p:sp>
+      <p:sp>
+        <p:nvSpPr>
+          <p:cNvPr id="11" name="Rounded Rectangle 10"/>
+          <p:cNvSpPr/>
+          <p:nvPr/>
+        </p:nvSpPr>
+        <p:spPr>
+          <a:xfrm>
+            <a:off x="4343400" y="1828800"/>
+            <a:ext cx="3657600" cy="310896"/>
+          </a:xfrm>
+          <a:prstGeom prst="roundRect">
+            <a:avLst/>
+          </a:prstGeom>
+          <a:solidFill>
+            <a:srgbClr val="1B2A41"/>
+          </a:solidFill>
+          <a:ln w="15875">
+            <a:solidFill>
+              <a:srgbClr val="1B2A41"/>
+            </a:solidFill>
+          </a:ln>
+        </p:spPr>
+        <p:style>
+          <a:lnRef idx="1">
+            <a:schemeClr val="accent1"/>
+          </a:lnRef>
+          <a:fillRef idx="3">
+            <a:schemeClr val="accent1"/>
+          </a:fillRef>
+          <a:effectRef idx="2">
+            <a:schemeClr val="accent1"/>
+          </a:effectRef>
+          <a:fontRef idx="minor">
+            <a:schemeClr val="lt1"/>
+          </a:fontRef>
+        </p:style>
+        <p:txBody>
+          <a:bodyPr rtlCol="0" anchor="ctr" wrap="square"/>
+          <a:lstStyle/>
+          <a:p>
+            <a:pPr algn="ctr"/>
+            <a:r>
+              <a:rPr sz="1150" b="1">
+                <a:solidFill>
+                  <a:srgbClr val="FAF7F0"/>
+                </a:solidFill>
+                <a:latin typeface="Menlo"/>
+              </a:rPr>
+              <a:t>E-2025-05-23-0411</a:t>
+            </a:r>
+          </a:p>
+        </p:txBody>
+      </p:sp>
+      <p:sp>
+        <p:nvSpPr>
+          <p:cNvPr id="12" name="TextBox 11"/>
+          <p:cNvSpPr txBox="1"/>
+          <p:nvPr/>
+        </p:nvSpPr>
+        <p:spPr>
+          <a:xfrm>
+            <a:off x="4453128" y="2176272"/>
+            <a:ext cx="3474720" cy="237744"/>
+          </a:xfrm>
+          <a:prstGeom prst="rect">
+            <a:avLst/>
+          </a:prstGeom>
+          <a:noFill/>
+        </p:spPr>
+        <p:txBody>
+          <a:bodyPr wrap="square">
+            <a:spAutoFit/>
+          </a:bodyPr>
+          <a:lstStyle/>
+          <a:p>
+            <a:pPr algn="l"/>
+            <a:r>
+              <a:rPr sz="1000" b="0" i="0">
                 <a:solidFill>
                   <a:srgbClr val="1B2A41"/>
                 </a:solidFill>
-                <a:latin typeface="Avenir Next"/>
-              </a:rPr>
-              <a:t>Entry 2</a:t>
-            </a:r>
-          </a:p>
-          <a:p>
-            <a:pPr algn="ctr"/>
-            <a:r>
-              <a:rPr sz="1200" b="0">
+                <a:latin typeface="Menlo"/>
+              </a:rPr>
+              <a:t>artifact: sha256:aa02…19bd</a:t>
+            </a:r>
+          </a:p>
+        </p:txBody>
+      </p:sp>
+      <p:sp>
+        <p:nvSpPr>
+          <p:cNvPr id="13" name="TextBox 12"/>
+          <p:cNvSpPr txBox="1"/>
+          <p:nvPr/>
+        </p:nvSpPr>
+        <p:spPr>
+          <a:xfrm>
+            <a:off x="4453128" y="2414015"/>
+            <a:ext cx="3474720" cy="237744"/>
+          </a:xfrm>
+          <a:prstGeom prst="rect">
+            <a:avLst/>
+          </a:prstGeom>
+          <a:noFill/>
+        </p:spPr>
+        <p:txBody>
+          <a:bodyPr wrap="square">
+            <a:spAutoFit/>
+          </a:bodyPr>
+          <a:lstStyle/>
+          <a:p>
+            <a:pPr algn="l"/>
+            <a:r>
+              <a:rPr sz="1000" b="0" i="0">
+                <a:solidFill>
+                  <a:srgbClr val="C99A2E"/>
+                </a:solidFill>
+                <a:latin typeface="Menlo"/>
+              </a:rPr>
+              <a:t>prev    : 27f0…6c11 ◄─┘</a:t>
+            </a:r>
+          </a:p>
+        </p:txBody>
+      </p:sp>
+      <p:sp>
+        <p:nvSpPr>
+          <p:cNvPr id="14" name="TextBox 13"/>
+          <p:cNvSpPr txBox="1"/>
+          <p:nvPr/>
+        </p:nvSpPr>
+        <p:spPr>
+          <a:xfrm>
+            <a:off x="4453128" y="2651759"/>
+            <a:ext cx="3474720" cy="237744"/>
+          </a:xfrm>
+          <a:prstGeom prst="rect">
+            <a:avLst/>
+          </a:prstGeom>
+          <a:noFill/>
+        </p:spPr>
+        <p:txBody>
+          <a:bodyPr wrap="square">
+            <a:spAutoFit/>
+          </a:bodyPr>
+          <a:lstStyle/>
+          <a:p>
+            <a:pPr algn="l"/>
+            <a:r>
+              <a:rPr sz="1000" b="0" i="0">
                 <a:solidFill>
                   <a:srgbClr val="1B2A41"/>
                 </a:solidFill>
-                <a:latin typeface="Avenir Next"/>
-              </a:rPr>
-              <a:t>prev: H1</a:t>
-            </a:r>
-          </a:p>
-          <a:p>
-            <a:pPr algn="ctr"/>
-            <a:r>
-              <a:rPr sz="1200" b="0">
-                <a:solidFill>
-                  <a:srgbClr val="1B2A41"/>
-                </a:solidFill>
                 <a:latin typeface="Menlo"/>
               </a:rPr>
-              <a:t>H2 = 41aa…</a:t>
-            </a:r>
-          </a:p>
-        </p:txBody>
-      </p:sp>
-      <p:sp>
-        <p:nvSpPr>
-          <p:cNvPr id="6" name="Rounded Rectangle 5"/>
+              <a:t>key_id  : ikm-2025-Q2-07</a:t>
+            </a:r>
+          </a:p>
+        </p:txBody>
+      </p:sp>
+      <p:sp>
+        <p:nvSpPr>
+          <p:cNvPr id="15" name="TextBox 14"/>
+          <p:cNvSpPr txBox="1"/>
+          <p:nvPr/>
+        </p:nvSpPr>
+        <p:spPr>
+          <a:xfrm>
+            <a:off x="4453128" y="2889503"/>
+            <a:ext cx="3474720" cy="237744"/>
+          </a:xfrm>
+          <a:prstGeom prst="rect">
+            <a:avLst/>
+          </a:prstGeom>
+          <a:noFill/>
+        </p:spPr>
+        <p:txBody>
+          <a:bodyPr wrap="square">
+            <a:spAutoFit/>
+          </a:bodyPr>
+          <a:lstStyle/>
+          <a:p>
+            <a:pPr algn="l"/>
+            <a:r>
+              <a:rPr sz="1000" b="0" i="0">
+                <a:solidFill>
+                  <a:srgbClr val="C99A2E"/>
+                </a:solidFill>
+                <a:latin typeface="Menlo"/>
+              </a:rPr>
+              <a:t>mac     : 5d81…e903 ──┐</a:t>
+            </a:r>
+          </a:p>
+        </p:txBody>
+      </p:sp>
+      <p:sp>
+        <p:nvSpPr>
+          <p:cNvPr id="16" name="Rounded Rectangle 15"/>
           <p:cNvSpPr/>
           <p:nvPr/>
         </p:nvSpPr>
         <p:spPr>
           <a:xfrm>
-            <a:off x="6400800" y="2377440"/>
-            <a:ext cx="2286000" cy="1554480"/>
+            <a:off x="8275320" y="1828800"/>
+            <a:ext cx="3657600" cy="1335024"/>
           </a:xfrm>
           <a:prstGeom prst="roundRect">
             <a:avLst/>
@@ -4762,58 +5919,25 @@
           <a:lstStyle/>
           <a:p>
             <a:pPr algn="ctr"/>
-            <a:r>
-              <a:rPr sz="1200" b="0">
-                <a:solidFill>
-                  <a:srgbClr val="1B2A41"/>
-                </a:solidFill>
-                <a:latin typeface="Avenir Next"/>
-              </a:rPr>
-              <a:t>Entry 3</a:t>
-            </a:r>
-          </a:p>
-          <a:p>
-            <a:pPr algn="ctr"/>
-            <a:r>
-              <a:rPr sz="1200" b="0">
-                <a:solidFill>
-                  <a:srgbClr val="1B2A41"/>
-                </a:solidFill>
-                <a:latin typeface="Avenir Next"/>
-              </a:rPr>
-              <a:t>prev: H2</a:t>
-            </a:r>
-          </a:p>
-          <a:p>
-            <a:pPr algn="ctr"/>
-            <a:r>
-              <a:rPr sz="1200" b="0">
-                <a:solidFill>
-                  <a:srgbClr val="1B2A41"/>
-                </a:solidFill>
-                <a:latin typeface="Menlo"/>
-              </a:rPr>
-              <a:t>H3 = c07f…</a:t>
-            </a:r>
-          </a:p>
-        </p:txBody>
-      </p:sp>
-      <p:sp>
-        <p:nvSpPr>
-          <p:cNvPr id="7" name="Rounded Rectangle 6"/>
+          </a:p>
+        </p:txBody>
+      </p:sp>
+      <p:sp>
+        <p:nvSpPr>
+          <p:cNvPr id="17" name="Rounded Rectangle 16"/>
           <p:cNvSpPr/>
           <p:nvPr/>
         </p:nvSpPr>
         <p:spPr>
           <a:xfrm>
-            <a:off x="9281160" y="2377440"/>
-            <a:ext cx="2286000" cy="1554480"/>
+            <a:off x="8275320" y="1828800"/>
+            <a:ext cx="3657600" cy="310896"/>
           </a:xfrm>
           <a:prstGeom prst="roundRect">
             <a:avLst/>
           </a:prstGeom>
           <a:solidFill>
-            <a:srgbClr val="FAF7F0"/>
+            <a:srgbClr val="1B2A41"/>
           </a:solidFill>
           <a:ln w="15875">
             <a:solidFill>
@@ -4841,58 +5965,174 @@
           <a:p>
             <a:pPr algn="ctr"/>
             <a:r>
-              <a:rPr sz="1200" b="0">
+              <a:rPr sz="1150" b="1">
+                <a:solidFill>
+                  <a:srgbClr val="FAF7F0"/>
+                </a:solidFill>
+                <a:latin typeface="Menlo"/>
+              </a:rPr>
+              <a:t>E-2025-05-23-0412</a:t>
+            </a:r>
+          </a:p>
+        </p:txBody>
+      </p:sp>
+      <p:sp>
+        <p:nvSpPr>
+          <p:cNvPr id="18" name="TextBox 17"/>
+          <p:cNvSpPr txBox="1"/>
+          <p:nvPr/>
+        </p:nvSpPr>
+        <p:spPr>
+          <a:xfrm>
+            <a:off x="8385048" y="2176272"/>
+            <a:ext cx="3474720" cy="237744"/>
+          </a:xfrm>
+          <a:prstGeom prst="rect">
+            <a:avLst/>
+          </a:prstGeom>
+          <a:noFill/>
+        </p:spPr>
+        <p:txBody>
+          <a:bodyPr wrap="square">
+            <a:spAutoFit/>
+          </a:bodyPr>
+          <a:lstStyle/>
+          <a:p>
+            <a:pPr algn="l"/>
+            <a:r>
+              <a:rPr sz="1000" b="0" i="0">
                 <a:solidFill>
                   <a:srgbClr val="1B2A41"/>
                 </a:solidFill>
-                <a:latin typeface="Avenir Next"/>
-              </a:rPr>
-              <a:t>Entry 4</a:t>
-            </a:r>
-          </a:p>
-          <a:p>
-            <a:pPr algn="ctr"/>
-            <a:r>
-              <a:rPr sz="1200" b="0">
+                <a:latin typeface="Menlo"/>
+              </a:rPr>
+              <a:t>artifact: sha256:7c19…e2a4</a:t>
+            </a:r>
+          </a:p>
+        </p:txBody>
+      </p:sp>
+      <p:sp>
+        <p:nvSpPr>
+          <p:cNvPr id="19" name="TextBox 18"/>
+          <p:cNvSpPr txBox="1"/>
+          <p:nvPr/>
+        </p:nvSpPr>
+        <p:spPr>
+          <a:xfrm>
+            <a:off x="8385048" y="2414015"/>
+            <a:ext cx="3474720" cy="237744"/>
+          </a:xfrm>
+          <a:prstGeom prst="rect">
+            <a:avLst/>
+          </a:prstGeom>
+          <a:noFill/>
+        </p:spPr>
+        <p:txBody>
+          <a:bodyPr wrap="square">
+            <a:spAutoFit/>
+          </a:bodyPr>
+          <a:lstStyle/>
+          <a:p>
+            <a:pPr algn="l"/>
+            <a:r>
+              <a:rPr sz="1000" b="0" i="0">
+                <a:solidFill>
+                  <a:srgbClr val="C99A2E"/>
+                </a:solidFill>
+                <a:latin typeface="Menlo"/>
+              </a:rPr>
+              <a:t>prev    : 5d81…e903 ◄─┘</a:t>
+            </a:r>
+          </a:p>
+        </p:txBody>
+      </p:sp>
+      <p:sp>
+        <p:nvSpPr>
+          <p:cNvPr id="20" name="TextBox 19"/>
+          <p:cNvSpPr txBox="1"/>
+          <p:nvPr/>
+        </p:nvSpPr>
+        <p:spPr>
+          <a:xfrm>
+            <a:off x="8385048" y="2651759"/>
+            <a:ext cx="3474720" cy="237744"/>
+          </a:xfrm>
+          <a:prstGeom prst="rect">
+            <a:avLst/>
+          </a:prstGeom>
+          <a:noFill/>
+        </p:spPr>
+        <p:txBody>
+          <a:bodyPr wrap="square">
+            <a:spAutoFit/>
+          </a:bodyPr>
+          <a:lstStyle/>
+          <a:p>
+            <a:pPr algn="l"/>
+            <a:r>
+              <a:rPr sz="1000" b="0" i="0">
                 <a:solidFill>
                   <a:srgbClr val="1B2A41"/>
                 </a:solidFill>
-                <a:latin typeface="Avenir Next"/>
-              </a:rPr>
-              <a:t>prev: H3</a:t>
-            </a:r>
-          </a:p>
-          <a:p>
-            <a:pPr algn="ctr"/>
-            <a:r>
-              <a:rPr sz="1200" b="0">
+                <a:latin typeface="Menlo"/>
+              </a:rPr>
+              <a:t>key_id  : ikm-2025-Q2-07</a:t>
+            </a:r>
+          </a:p>
+        </p:txBody>
+      </p:sp>
+      <p:sp>
+        <p:nvSpPr>
+          <p:cNvPr id="21" name="TextBox 20"/>
+          <p:cNvSpPr txBox="1"/>
+          <p:nvPr/>
+        </p:nvSpPr>
+        <p:spPr>
+          <a:xfrm>
+            <a:off x="8385048" y="2889503"/>
+            <a:ext cx="3474720" cy="237744"/>
+          </a:xfrm>
+          <a:prstGeom prst="rect">
+            <a:avLst/>
+          </a:prstGeom>
+          <a:noFill/>
+        </p:spPr>
+        <p:txBody>
+          <a:bodyPr wrap="square">
+            <a:spAutoFit/>
+          </a:bodyPr>
+          <a:lstStyle/>
+          <a:p>
+            <a:pPr algn="l"/>
+            <a:r>
+              <a:rPr sz="1000" b="0" i="0">
                 <a:solidFill>
                   <a:srgbClr val="1B2A41"/>
                 </a:solidFill>
                 <a:latin typeface="Menlo"/>
               </a:rPr>
-              <a:t>H4 = 88d1…</a:t>
+              <a:t>mac     : b44a…91c7 → 0413…</a:t>
             </a:r>
           </a:p>
         </p:txBody>
       </p:sp>
       <p:cxnSp>
         <p:nvCxnSpPr>
-          <p:cNvPr id="8" name="Connector 7"/>
+          <p:cNvPr id="22" name="Connector 21"/>
           <p:cNvCxnSpPr/>
           <p:nvPr/>
         </p:nvCxnSpPr>
         <p:spPr>
           <a:xfrm>
-            <a:off x="2926080" y="3154680"/>
-            <a:ext cx="594359" cy="0"/>
+            <a:off x="4069080" y="2606040"/>
+            <a:ext cx="274320" cy="0"/>
           </a:xfrm>
           <a:prstGeom prst="line">
             <a:avLst/>
           </a:prstGeom>
-          <a:ln w="28575">
+          <a:ln w="31750">
             <a:solidFill>
-              <a:srgbClr val="0E7C7B"/>
+              <a:srgbClr val="C99A2E"/>
             </a:solidFill>
             <a:tailEnd type="arrow"/>
           </a:ln>
@@ -4914,21 +6154,21 @@
       </p:cxnSp>
       <p:cxnSp>
         <p:nvCxnSpPr>
-          <p:cNvPr id="9" name="Connector 8"/>
+          <p:cNvPr id="23" name="Connector 22"/>
           <p:cNvCxnSpPr/>
           <p:nvPr/>
         </p:nvCxnSpPr>
         <p:spPr>
           <a:xfrm>
-            <a:off x="5806440" y="3154680"/>
-            <a:ext cx="594360" cy="0"/>
+            <a:off x="8001000" y="2606040"/>
+            <a:ext cx="274320" cy="0"/>
           </a:xfrm>
           <a:prstGeom prst="line">
             <a:avLst/>
           </a:prstGeom>
-          <a:ln w="28575">
+          <a:ln w="31750">
             <a:solidFill>
-              <a:srgbClr val="0E7C7B"/>
+              <a:srgbClr val="C99A2E"/>
             </a:solidFill>
             <a:tailEnd type="arrow"/>
           </a:ln>
@@ -4948,52 +6188,16 @@
           </a:fontRef>
         </p:style>
       </p:cxnSp>
-      <p:cxnSp>
-        <p:nvCxnSpPr>
-          <p:cNvPr id="10" name="Connector 9"/>
-          <p:cNvCxnSpPr/>
-          <p:nvPr/>
-        </p:nvCxnSpPr>
-        <p:spPr>
-          <a:xfrm>
-            <a:off x="8686800" y="3154680"/>
-            <a:ext cx="594360" cy="0"/>
-          </a:xfrm>
-          <a:prstGeom prst="line">
-            <a:avLst/>
-          </a:prstGeom>
-          <a:ln w="28575">
-            <a:solidFill>
-              <a:srgbClr val="0E7C7B"/>
-            </a:solidFill>
-            <a:tailEnd type="arrow"/>
-          </a:ln>
-        </p:spPr>
-        <p:style>
-          <a:lnRef idx="2">
-            <a:schemeClr val="accent1"/>
-          </a:lnRef>
-          <a:fillRef idx="0">
-            <a:schemeClr val="accent1"/>
-          </a:fillRef>
-          <a:effectRef idx="1">
-            <a:schemeClr val="accent1"/>
-          </a:effectRef>
-          <a:fontRef idx="minor">
-            <a:schemeClr val="tx1"/>
-          </a:fontRef>
-        </p:style>
-      </p:cxnSp>
-      <p:sp>
-        <p:nvSpPr>
-          <p:cNvPr id="11" name="TextBox 10"/>
+      <p:sp>
+        <p:nvSpPr>
+          <p:cNvPr id="24" name="TextBox 23"/>
           <p:cNvSpPr txBox="1"/>
           <p:nvPr/>
         </p:nvSpPr>
         <p:spPr>
           <a:xfrm>
-            <a:off x="731520" y="4480560"/>
-            <a:ext cx="10881360" cy="1463040"/>
+            <a:off x="548640" y="4023360"/>
+            <a:ext cx="11155680" cy="1737360"/>
           </a:xfrm>
           <a:prstGeom prst="rect">
             <a:avLst/>
@@ -5008,37 +6212,49 @@
           <a:p>
             <a:pPr algn="l"/>
             <a:r>
-              <a:rPr sz="1500" b="0" i="0">
+              <a:rPr sz="1450" b="0" i="0">
                 <a:solidFill>
                   <a:srgbClr val="1B2A41"/>
                 </a:solidFill>
                 <a:latin typeface="Avenir Next"/>
               </a:rPr>
-              <a:t>Each entry's hash covers the previous entry's hash. Insert, delete, or reorder anything and the links</a:t>
-            </a:r>
-          </a:p>
-          <a:p>
-            <a:pPr algn="l"/>
-            <a:r>
-              <a:rPr sz="1500" b="0" i="0">
+              <a:t>Each entry's mac covers its own fields INCLUDING prev_entry_mac — so 0412's mac depends on 0411's,</a:t>
+            </a:r>
+          </a:p>
+          <a:p>
+            <a:pPr algn="l"/>
+            <a:r>
+              <a:rPr sz="1450" b="0" i="0">
                 <a:solidFill>
                   <a:srgbClr val="1B2A41"/>
                 </a:solidFill>
                 <a:latin typeface="Avenir Next"/>
               </a:rPr>
-              <a:t>stop matching. The chain doesn't just protect records — it protects the SEQUENCE of records,</a:t>
-            </a:r>
-          </a:p>
-          <a:p>
-            <a:pPr algn="l"/>
-            <a:r>
-              <a:rPr sz="1500" b="0" i="0">
+              <a:t>which depends on 0410's, all the way back to genesis. Insert, delete, or reorder anything and the links</a:t>
+            </a:r>
+          </a:p>
+          <a:p>
+            <a:pPr algn="l"/>
+            <a:r>
+              <a:rPr sz="1450" b="0" i="0">
                 <a:solidFill>
                   <a:srgbClr val="1B2A41"/>
                 </a:solidFill>
                 <a:latin typeface="Avenir Next"/>
               </a:rPr>
-              <a:t>which is what lets an ordering claim ("notice A preceded notice B") be proved, not asserted.</a:t>
+              <a:t>stop matching. The chain protects the SEQUENCE, which is what lets an ordering claim</a:t>
+            </a:r>
+          </a:p>
+          <a:p>
+            <a:pPr algn="l"/>
+            <a:r>
+              <a:rPr sz="1450" b="0" i="0">
+                <a:solidFill>
+                  <a:srgbClr val="1B2A41"/>
+                </a:solidFill>
+                <a:latin typeface="Avenir Next"/>
+              </a:rPr>
+              <a:t>("regulator notice preceded customer notice") be proved, not asserted.</a:t>
             </a:r>
           </a:p>
         </p:txBody>
@@ -5077,8 +6293,8 @@
         </p:nvSpPr>
         <p:spPr>
           <a:xfrm>
-            <a:off x="548640" y="320040"/>
-            <a:ext cx="11064240" cy="822960"/>
+            <a:off x="548640" y="274320"/>
+            <a:ext cx="11064240" cy="731520"/>
           </a:xfrm>
           <a:prstGeom prst="rect">
             <a:avLst/>
@@ -5093,7 +6309,7 @@
           <a:p>
             <a:pPr algn="l"/>
             <a:r>
-              <a:rPr sz="3000" b="1" i="0">
+              <a:rPr sz="2800" b="1" i="0">
                 <a:solidFill>
                   <a:srgbClr val="1B2A41"/>
                 </a:solidFill>
@@ -5112,7 +6328,7 @@
         </p:nvSpPr>
         <p:spPr>
           <a:xfrm>
-            <a:off x="548640" y="960120"/>
+            <a:off x="548640" y="868680"/>
             <a:ext cx="11064240" cy="457200"/>
           </a:xfrm>
           <a:prstGeom prst="rect">
@@ -5128,13 +6344,13 @@
           <a:p>
             <a:pPr algn="l"/>
             <a:r>
-              <a:rPr sz="1500" b="0" i="1">
+              <a:rPr sz="1400" b="0" i="1">
                 <a:solidFill>
                   <a:srgbClr val="6B7480"/>
                 </a:solidFill>
                 <a:latin typeface="Avenir Next"/>
               </a:rPr>
-              <a:t>The day's entries roll up to one root; the root gets signed and published</a:t>
+              <a:t>May 23, 2025: 517 entry MACs roll up to one root; the root is signed and published</a:t>
             </a:r>
           </a:p>
         </p:txBody>
@@ -5147,8 +6363,8 @@
         </p:nvSpPr>
         <p:spPr>
           <a:xfrm>
-            <a:off x="914400" y="4937760"/>
-            <a:ext cx="1737360" cy="685800"/>
+            <a:off x="457200" y="4892040"/>
+            <a:ext cx="2377440" cy="621792"/>
           </a:xfrm>
           <a:prstGeom prst="roundRect">
             <a:avLst/>
@@ -5181,15 +6397,6 @@
           <a:lstStyle/>
           <a:p>
             <a:pPr algn="ctr"/>
-            <a:r>
-              <a:rPr sz="1300" b="0">
-                <a:solidFill>
-                  <a:srgbClr val="1B2A41"/>
-                </a:solidFill>
-                <a:latin typeface="Menlo"/>
-              </a:rPr>
-              <a:t>H1</a:t>
-            </a:r>
           </a:p>
         </p:txBody>
       </p:sp>
@@ -5201,8 +6408,97 @@
         </p:nvSpPr>
         <p:spPr>
           <a:xfrm>
-            <a:off x="3017520" y="4937760"/>
-            <a:ext cx="1737360" cy="685800"/>
+            <a:off x="457200" y="4892040"/>
+            <a:ext cx="2377440" cy="310896"/>
+          </a:xfrm>
+          <a:prstGeom prst="roundRect">
+            <a:avLst/>
+          </a:prstGeom>
+          <a:solidFill>
+            <a:srgbClr val="1B2A41"/>
+          </a:solidFill>
+          <a:ln w="15875">
+            <a:solidFill>
+              <a:srgbClr val="1B2A41"/>
+            </a:solidFill>
+          </a:ln>
+        </p:spPr>
+        <p:style>
+          <a:lnRef idx="1">
+            <a:schemeClr val="accent1"/>
+          </a:lnRef>
+          <a:fillRef idx="3">
+            <a:schemeClr val="accent1"/>
+          </a:fillRef>
+          <a:effectRef idx="2">
+            <a:schemeClr val="accent1"/>
+          </a:effectRef>
+          <a:fontRef idx="minor">
+            <a:schemeClr val="lt1"/>
+          </a:fontRef>
+        </p:style>
+        <p:txBody>
+          <a:bodyPr rtlCol="0" anchor="ctr" wrap="square"/>
+          <a:lstStyle/>
+          <a:p>
+            <a:pPr algn="ctr"/>
+            <a:r>
+              <a:rPr sz="1150" b="1">
+                <a:solidFill>
+                  <a:srgbClr val="FAF7F0"/>
+                </a:solidFill>
+                <a:latin typeface="Menlo"/>
+              </a:rPr>
+              <a:t>leaf 0411</a:t>
+            </a:r>
+          </a:p>
+        </p:txBody>
+      </p:sp>
+      <p:sp>
+        <p:nvSpPr>
+          <p:cNvPr id="6" name="TextBox 5"/>
+          <p:cNvSpPr txBox="1"/>
+          <p:nvPr/>
+        </p:nvSpPr>
+        <p:spPr>
+          <a:xfrm>
+            <a:off x="566928" y="5239512"/>
+            <a:ext cx="2194560" cy="237744"/>
+          </a:xfrm>
+          <a:prstGeom prst="rect">
+            <a:avLst/>
+          </a:prstGeom>
+          <a:noFill/>
+        </p:spPr>
+        <p:txBody>
+          <a:bodyPr wrap="square">
+            <a:spAutoFit/>
+          </a:bodyPr>
+          <a:lstStyle/>
+          <a:p>
+            <a:pPr algn="l"/>
+            <a:r>
+              <a:rPr sz="1000" b="0" i="0">
+                <a:solidFill>
+                  <a:srgbClr val="1B2A41"/>
+                </a:solidFill>
+                <a:latin typeface="Menlo"/>
+              </a:rPr>
+              <a:t>5d81…e903</a:t>
+            </a:r>
+          </a:p>
+        </p:txBody>
+      </p:sp>
+      <p:sp>
+        <p:nvSpPr>
+          <p:cNvPr id="7" name="Rounded Rectangle 6"/>
+          <p:cNvSpPr/>
+          <p:nvPr/>
+        </p:nvSpPr>
+        <p:spPr>
+          <a:xfrm>
+            <a:off x="3017520" y="4892040"/>
+            <a:ext cx="2377440" cy="621792"/>
           </a:xfrm>
           <a:prstGeom prst="roundRect">
             <a:avLst/>
@@ -5235,28 +6531,108 @@
           <a:lstStyle/>
           <a:p>
             <a:pPr algn="ctr"/>
-            <a:r>
-              <a:rPr sz="1300" b="0">
+          </a:p>
+        </p:txBody>
+      </p:sp>
+      <p:sp>
+        <p:nvSpPr>
+          <p:cNvPr id="8" name="Rounded Rectangle 7"/>
+          <p:cNvSpPr/>
+          <p:nvPr/>
+        </p:nvSpPr>
+        <p:spPr>
+          <a:xfrm>
+            <a:off x="3017520" y="4892040"/>
+            <a:ext cx="2377440" cy="310896"/>
+          </a:xfrm>
+          <a:prstGeom prst="roundRect">
+            <a:avLst/>
+          </a:prstGeom>
+          <a:solidFill>
+            <a:srgbClr val="1B2A41"/>
+          </a:solidFill>
+          <a:ln w="15875">
+            <a:solidFill>
+              <a:srgbClr val="1B2A41"/>
+            </a:solidFill>
+          </a:ln>
+        </p:spPr>
+        <p:style>
+          <a:lnRef idx="1">
+            <a:schemeClr val="accent1"/>
+          </a:lnRef>
+          <a:fillRef idx="3">
+            <a:schemeClr val="accent1"/>
+          </a:fillRef>
+          <a:effectRef idx="2">
+            <a:schemeClr val="accent1"/>
+          </a:effectRef>
+          <a:fontRef idx="minor">
+            <a:schemeClr val="lt1"/>
+          </a:fontRef>
+        </p:style>
+        <p:txBody>
+          <a:bodyPr rtlCol="0" anchor="ctr" wrap="square"/>
+          <a:lstStyle/>
+          <a:p>
+            <a:pPr algn="ctr"/>
+            <a:r>
+              <a:rPr sz="1150" b="1">
+                <a:solidFill>
+                  <a:srgbClr val="FAF7F0"/>
+                </a:solidFill>
+                <a:latin typeface="Menlo"/>
+              </a:rPr>
+              <a:t>leaf 0412</a:t>
+            </a:r>
+          </a:p>
+        </p:txBody>
+      </p:sp>
+      <p:sp>
+        <p:nvSpPr>
+          <p:cNvPr id="9" name="TextBox 8"/>
+          <p:cNvSpPr txBox="1"/>
+          <p:nvPr/>
+        </p:nvSpPr>
+        <p:spPr>
+          <a:xfrm>
+            <a:off x="3127248" y="5239512"/>
+            <a:ext cx="2194560" cy="237744"/>
+          </a:xfrm>
+          <a:prstGeom prst="rect">
+            <a:avLst/>
+          </a:prstGeom>
+          <a:noFill/>
+        </p:spPr>
+        <p:txBody>
+          <a:bodyPr wrap="square">
+            <a:spAutoFit/>
+          </a:bodyPr>
+          <a:lstStyle/>
+          <a:p>
+            <a:pPr algn="l"/>
+            <a:r>
+              <a:rPr sz="1000" b="0" i="0">
                 <a:solidFill>
                   <a:srgbClr val="1B2A41"/>
                 </a:solidFill>
                 <a:latin typeface="Menlo"/>
               </a:rPr>
-              <a:t>H2</a:t>
-            </a:r>
-          </a:p>
-        </p:txBody>
-      </p:sp>
-      <p:sp>
-        <p:nvSpPr>
-          <p:cNvPr id="6" name="Rounded Rectangle 5"/>
+              <a:t>b44a…91c7</a:t>
+            </a:r>
+          </a:p>
+        </p:txBody>
+      </p:sp>
+      <p:sp>
+        <p:nvSpPr>
+          <p:cNvPr id="10" name="Rounded Rectangle 9"/>
           <p:cNvSpPr/>
           <p:nvPr/>
         </p:nvSpPr>
         <p:spPr>
           <a:xfrm>
-            <a:off x="5120640" y="4937760"/>
-            <a:ext cx="1737360" cy="685800"/>
+            <a:off x="5577840" y="4892040"/>
+            <a:ext cx="2377440" cy="621792"/>
           </a:xfrm>
           <a:prstGeom prst="roundRect">
             <a:avLst/>
@@ -5289,28 +6665,795 @@
           <a:lstStyle/>
           <a:p>
             <a:pPr algn="ctr"/>
-            <a:r>
-              <a:rPr sz="1300" b="0">
+          </a:p>
+        </p:txBody>
+      </p:sp>
+      <p:sp>
+        <p:nvSpPr>
+          <p:cNvPr id="11" name="Rounded Rectangle 10"/>
+          <p:cNvSpPr/>
+          <p:nvPr/>
+        </p:nvSpPr>
+        <p:spPr>
+          <a:xfrm>
+            <a:off x="5577840" y="4892040"/>
+            <a:ext cx="2377440" cy="310896"/>
+          </a:xfrm>
+          <a:prstGeom prst="roundRect">
+            <a:avLst/>
+          </a:prstGeom>
+          <a:solidFill>
+            <a:srgbClr val="1B2A41"/>
+          </a:solidFill>
+          <a:ln w="15875">
+            <a:solidFill>
+              <a:srgbClr val="1B2A41"/>
+            </a:solidFill>
+          </a:ln>
+        </p:spPr>
+        <p:style>
+          <a:lnRef idx="1">
+            <a:schemeClr val="accent1"/>
+          </a:lnRef>
+          <a:fillRef idx="3">
+            <a:schemeClr val="accent1"/>
+          </a:fillRef>
+          <a:effectRef idx="2">
+            <a:schemeClr val="accent1"/>
+          </a:effectRef>
+          <a:fontRef idx="minor">
+            <a:schemeClr val="lt1"/>
+          </a:fontRef>
+        </p:style>
+        <p:txBody>
+          <a:bodyPr rtlCol="0" anchor="ctr" wrap="square"/>
+          <a:lstStyle/>
+          <a:p>
+            <a:pPr algn="ctr"/>
+            <a:r>
+              <a:rPr sz="1150" b="1">
+                <a:solidFill>
+                  <a:srgbClr val="FAF7F0"/>
+                </a:solidFill>
+                <a:latin typeface="Menlo"/>
+              </a:rPr>
+              <a:t>leaf 0413</a:t>
+            </a:r>
+          </a:p>
+        </p:txBody>
+      </p:sp>
+      <p:sp>
+        <p:nvSpPr>
+          <p:cNvPr id="12" name="TextBox 11"/>
+          <p:cNvSpPr txBox="1"/>
+          <p:nvPr/>
+        </p:nvSpPr>
+        <p:spPr>
+          <a:xfrm>
+            <a:off x="5687568" y="5239512"/>
+            <a:ext cx="2194560" cy="237744"/>
+          </a:xfrm>
+          <a:prstGeom prst="rect">
+            <a:avLst/>
+          </a:prstGeom>
+          <a:noFill/>
+        </p:spPr>
+        <p:txBody>
+          <a:bodyPr wrap="square">
+            <a:spAutoFit/>
+          </a:bodyPr>
+          <a:lstStyle/>
+          <a:p>
+            <a:pPr algn="l"/>
+            <a:r>
+              <a:rPr sz="1000" b="0" i="0">
                 <a:solidFill>
                   <a:srgbClr val="1B2A41"/>
                 </a:solidFill>
                 <a:latin typeface="Menlo"/>
               </a:rPr>
-              <a:t>H3</a:t>
-            </a:r>
-          </a:p>
-        </p:txBody>
-      </p:sp>
-      <p:sp>
-        <p:nvSpPr>
-          <p:cNvPr id="7" name="Rounded Rectangle 6"/>
+              <a:t>09fe…7731</a:t>
+            </a:r>
+          </a:p>
+        </p:txBody>
+      </p:sp>
+      <p:sp>
+        <p:nvSpPr>
+          <p:cNvPr id="13" name="TextBox 12"/>
+          <p:cNvSpPr txBox="1"/>
+          <p:nvPr/>
+        </p:nvSpPr>
+        <p:spPr>
+          <a:xfrm>
+            <a:off x="8092440" y="5029200"/>
+            <a:ext cx="1280160" cy="457200"/>
+          </a:xfrm>
+          <a:prstGeom prst="rect">
+            <a:avLst/>
+          </a:prstGeom>
+          <a:noFill/>
+        </p:spPr>
+        <p:txBody>
+          <a:bodyPr wrap="square">
+            <a:spAutoFit/>
+          </a:bodyPr>
+          <a:lstStyle/>
+          <a:p>
+            <a:pPr algn="l"/>
+            <a:r>
+              <a:rPr sz="1200" b="0" i="0">
+                <a:solidFill>
+                  <a:srgbClr val="6B7480"/>
+                </a:solidFill>
+                <a:latin typeface="Menlo"/>
+              </a:rPr>
+              <a:t>… ×517</a:t>
+            </a:r>
+          </a:p>
+        </p:txBody>
+      </p:sp>
+      <p:sp>
+        <p:nvSpPr>
+          <p:cNvPr id="14" name="Rounded Rectangle 13"/>
           <p:cNvSpPr/>
           <p:nvPr/>
         </p:nvSpPr>
         <p:spPr>
           <a:xfrm>
-            <a:off x="7223760" y="4937760"/>
-            <a:ext cx="1737360" cy="685800"/>
+            <a:off x="1737360" y="3657600"/>
+            <a:ext cx="2377440" cy="859536"/>
+          </a:xfrm>
+          <a:prstGeom prst="roundRect">
+            <a:avLst/>
+          </a:prstGeom>
+          <a:solidFill>
+            <a:srgbClr val="E7EEF2"/>
+          </a:solidFill>
+          <a:ln w="15875">
+            <a:solidFill>
+              <a:srgbClr val="1B2A41"/>
+            </a:solidFill>
+          </a:ln>
+        </p:spPr>
+        <p:style>
+          <a:lnRef idx="1">
+            <a:schemeClr val="accent1"/>
+          </a:lnRef>
+          <a:fillRef idx="3">
+            <a:schemeClr val="accent1"/>
+          </a:fillRef>
+          <a:effectRef idx="2">
+            <a:schemeClr val="accent1"/>
+          </a:effectRef>
+          <a:fontRef idx="minor">
+            <a:schemeClr val="lt1"/>
+          </a:fontRef>
+        </p:style>
+        <p:txBody>
+          <a:bodyPr rtlCol="0" anchor="ctr" wrap="square"/>
+          <a:lstStyle/>
+          <a:p>
+            <a:pPr algn="ctr"/>
+          </a:p>
+        </p:txBody>
+      </p:sp>
+      <p:sp>
+        <p:nvSpPr>
+          <p:cNvPr id="15" name="Rounded Rectangle 14"/>
+          <p:cNvSpPr/>
+          <p:nvPr/>
+        </p:nvSpPr>
+        <p:spPr>
+          <a:xfrm>
+            <a:off x="1737360" y="3657600"/>
+            <a:ext cx="2377440" cy="310896"/>
+          </a:xfrm>
+          <a:prstGeom prst="roundRect">
+            <a:avLst/>
+          </a:prstGeom>
+          <a:solidFill>
+            <a:srgbClr val="1B2A41"/>
+          </a:solidFill>
+          <a:ln w="15875">
+            <a:solidFill>
+              <a:srgbClr val="1B2A41"/>
+            </a:solidFill>
+          </a:ln>
+        </p:spPr>
+        <p:style>
+          <a:lnRef idx="1">
+            <a:schemeClr val="accent1"/>
+          </a:lnRef>
+          <a:fillRef idx="3">
+            <a:schemeClr val="accent1"/>
+          </a:fillRef>
+          <a:effectRef idx="2">
+            <a:schemeClr val="accent1"/>
+          </a:effectRef>
+          <a:fontRef idx="minor">
+            <a:schemeClr val="lt1"/>
+          </a:fontRef>
+        </p:style>
+        <p:txBody>
+          <a:bodyPr rtlCol="0" anchor="ctr" wrap="square"/>
+          <a:lstStyle/>
+          <a:p>
+            <a:pPr algn="ctr"/>
+            <a:r>
+              <a:rPr sz="1150" b="1">
+                <a:solidFill>
+                  <a:srgbClr val="FAF7F0"/>
+                </a:solidFill>
+                <a:latin typeface="Menlo"/>
+              </a:rPr>
+              <a:t>node</a:t>
+            </a:r>
+          </a:p>
+        </p:txBody>
+      </p:sp>
+      <p:sp>
+        <p:nvSpPr>
+          <p:cNvPr id="16" name="TextBox 15"/>
+          <p:cNvSpPr txBox="1"/>
+          <p:nvPr/>
+        </p:nvSpPr>
+        <p:spPr>
+          <a:xfrm>
+            <a:off x="1847088" y="4005072"/>
+            <a:ext cx="2194560" cy="237744"/>
+          </a:xfrm>
+          <a:prstGeom prst="rect">
+            <a:avLst/>
+          </a:prstGeom>
+          <a:noFill/>
+        </p:spPr>
+        <p:txBody>
+          <a:bodyPr wrap="square">
+            <a:spAutoFit/>
+          </a:bodyPr>
+          <a:lstStyle/>
+          <a:p>
+            <a:pPr algn="l"/>
+            <a:r>
+              <a:rPr sz="1000" b="0" i="0">
+                <a:solidFill>
+                  <a:srgbClr val="1B2A41"/>
+                </a:solidFill>
+                <a:latin typeface="Menlo"/>
+              </a:rPr>
+              <a:t>h(5d81…|b44a…)</a:t>
+            </a:r>
+          </a:p>
+        </p:txBody>
+      </p:sp>
+      <p:sp>
+        <p:nvSpPr>
+          <p:cNvPr id="17" name="TextBox 16"/>
+          <p:cNvSpPr txBox="1"/>
+          <p:nvPr/>
+        </p:nvSpPr>
+        <p:spPr>
+          <a:xfrm>
+            <a:off x="1847088" y="4242816"/>
+            <a:ext cx="2194560" cy="237744"/>
+          </a:xfrm>
+          <a:prstGeom prst="rect">
+            <a:avLst/>
+          </a:prstGeom>
+          <a:noFill/>
+        </p:spPr>
+        <p:txBody>
+          <a:bodyPr wrap="square">
+            <a:spAutoFit/>
+          </a:bodyPr>
+          <a:lstStyle/>
+          <a:p>
+            <a:pPr algn="l"/>
+            <a:r>
+              <a:rPr sz="1000" b="0" i="0">
+                <a:solidFill>
+                  <a:srgbClr val="1B2A41"/>
+                </a:solidFill>
+                <a:latin typeface="Menlo"/>
+              </a:rPr>
+              <a:t>= e3c7…20aa</a:t>
+            </a:r>
+          </a:p>
+        </p:txBody>
+      </p:sp>
+      <p:sp>
+        <p:nvSpPr>
+          <p:cNvPr id="18" name="Rounded Rectangle 17"/>
+          <p:cNvSpPr/>
+          <p:nvPr/>
+        </p:nvSpPr>
+        <p:spPr>
+          <a:xfrm>
+            <a:off x="4937760" y="3657600"/>
+            <a:ext cx="2377440" cy="859536"/>
+          </a:xfrm>
+          <a:prstGeom prst="roundRect">
+            <a:avLst/>
+          </a:prstGeom>
+          <a:solidFill>
+            <a:srgbClr val="E7EEF2"/>
+          </a:solidFill>
+          <a:ln w="15875">
+            <a:solidFill>
+              <a:srgbClr val="1B2A41"/>
+            </a:solidFill>
+          </a:ln>
+        </p:spPr>
+        <p:style>
+          <a:lnRef idx="1">
+            <a:schemeClr val="accent1"/>
+          </a:lnRef>
+          <a:fillRef idx="3">
+            <a:schemeClr val="accent1"/>
+          </a:fillRef>
+          <a:effectRef idx="2">
+            <a:schemeClr val="accent1"/>
+          </a:effectRef>
+          <a:fontRef idx="minor">
+            <a:schemeClr val="lt1"/>
+          </a:fontRef>
+        </p:style>
+        <p:txBody>
+          <a:bodyPr rtlCol="0" anchor="ctr" wrap="square"/>
+          <a:lstStyle/>
+          <a:p>
+            <a:pPr algn="ctr"/>
+          </a:p>
+        </p:txBody>
+      </p:sp>
+      <p:sp>
+        <p:nvSpPr>
+          <p:cNvPr id="19" name="Rounded Rectangle 18"/>
+          <p:cNvSpPr/>
+          <p:nvPr/>
+        </p:nvSpPr>
+        <p:spPr>
+          <a:xfrm>
+            <a:off x="4937760" y="3657600"/>
+            <a:ext cx="2377440" cy="310896"/>
+          </a:xfrm>
+          <a:prstGeom prst="roundRect">
+            <a:avLst/>
+          </a:prstGeom>
+          <a:solidFill>
+            <a:srgbClr val="1B2A41"/>
+          </a:solidFill>
+          <a:ln w="15875">
+            <a:solidFill>
+              <a:srgbClr val="1B2A41"/>
+            </a:solidFill>
+          </a:ln>
+        </p:spPr>
+        <p:style>
+          <a:lnRef idx="1">
+            <a:schemeClr val="accent1"/>
+          </a:lnRef>
+          <a:fillRef idx="3">
+            <a:schemeClr val="accent1"/>
+          </a:fillRef>
+          <a:effectRef idx="2">
+            <a:schemeClr val="accent1"/>
+          </a:effectRef>
+          <a:fontRef idx="minor">
+            <a:schemeClr val="lt1"/>
+          </a:fontRef>
+        </p:style>
+        <p:txBody>
+          <a:bodyPr rtlCol="0" anchor="ctr" wrap="square"/>
+          <a:lstStyle/>
+          <a:p>
+            <a:pPr algn="ctr"/>
+            <a:r>
+              <a:rPr sz="1150" b="1">
+                <a:solidFill>
+                  <a:srgbClr val="FAF7F0"/>
+                </a:solidFill>
+                <a:latin typeface="Menlo"/>
+              </a:rPr>
+              <a:t>node</a:t>
+            </a:r>
+          </a:p>
+        </p:txBody>
+      </p:sp>
+      <p:sp>
+        <p:nvSpPr>
+          <p:cNvPr id="20" name="TextBox 19"/>
+          <p:cNvSpPr txBox="1"/>
+          <p:nvPr/>
+        </p:nvSpPr>
+        <p:spPr>
+          <a:xfrm>
+            <a:off x="5047488" y="4005072"/>
+            <a:ext cx="2194560" cy="237744"/>
+          </a:xfrm>
+          <a:prstGeom prst="rect">
+            <a:avLst/>
+          </a:prstGeom>
+          <a:noFill/>
+        </p:spPr>
+        <p:txBody>
+          <a:bodyPr wrap="square">
+            <a:spAutoFit/>
+          </a:bodyPr>
+          <a:lstStyle/>
+          <a:p>
+            <a:pPr algn="l"/>
+            <a:r>
+              <a:rPr sz="1000" b="0" i="0">
+                <a:solidFill>
+                  <a:srgbClr val="1B2A41"/>
+                </a:solidFill>
+                <a:latin typeface="Menlo"/>
+              </a:rPr>
+              <a:t>h(09fe…|…)</a:t>
+            </a:r>
+          </a:p>
+        </p:txBody>
+      </p:sp>
+      <p:sp>
+        <p:nvSpPr>
+          <p:cNvPr id="21" name="TextBox 20"/>
+          <p:cNvSpPr txBox="1"/>
+          <p:nvPr/>
+        </p:nvSpPr>
+        <p:spPr>
+          <a:xfrm>
+            <a:off x="5047488" y="4242816"/>
+            <a:ext cx="2194560" cy="237744"/>
+          </a:xfrm>
+          <a:prstGeom prst="rect">
+            <a:avLst/>
+          </a:prstGeom>
+          <a:noFill/>
+        </p:spPr>
+        <p:txBody>
+          <a:bodyPr wrap="square">
+            <a:spAutoFit/>
+          </a:bodyPr>
+          <a:lstStyle/>
+          <a:p>
+            <a:pPr algn="l"/>
+            <a:r>
+              <a:rPr sz="1000" b="0" i="0">
+                <a:solidFill>
+                  <a:srgbClr val="1B2A41"/>
+                </a:solidFill>
+                <a:latin typeface="Menlo"/>
+              </a:rPr>
+              <a:t>= 91d5…b3fe</a:t>
+            </a:r>
+          </a:p>
+        </p:txBody>
+      </p:sp>
+      <p:sp>
+        <p:nvSpPr>
+          <p:cNvPr id="22" name="Rounded Rectangle 21"/>
+          <p:cNvSpPr/>
+          <p:nvPr/>
+        </p:nvSpPr>
+        <p:spPr>
+          <a:xfrm>
+            <a:off x="3291840" y="2331720"/>
+            <a:ext cx="2651760" cy="621792"/>
+          </a:xfrm>
+          <a:prstGeom prst="roundRect">
+            <a:avLst/>
+          </a:prstGeom>
+          <a:solidFill>
+            <a:srgbClr val="E7EEF2"/>
+          </a:solidFill>
+          <a:ln w="15875">
+            <a:solidFill>
+              <a:srgbClr val="0E7C7B"/>
+            </a:solidFill>
+          </a:ln>
+        </p:spPr>
+        <p:style>
+          <a:lnRef idx="1">
+            <a:schemeClr val="accent1"/>
+          </a:lnRef>
+          <a:fillRef idx="3">
+            <a:schemeClr val="accent1"/>
+          </a:fillRef>
+          <a:effectRef idx="2">
+            <a:schemeClr val="accent1"/>
+          </a:effectRef>
+          <a:fontRef idx="minor">
+            <a:schemeClr val="lt1"/>
+          </a:fontRef>
+        </p:style>
+        <p:txBody>
+          <a:bodyPr rtlCol="0" anchor="ctr" wrap="square"/>
+          <a:lstStyle/>
+          <a:p>
+            <a:pPr algn="ctr"/>
+          </a:p>
+        </p:txBody>
+      </p:sp>
+      <p:sp>
+        <p:nvSpPr>
+          <p:cNvPr id="23" name="Rounded Rectangle 22"/>
+          <p:cNvSpPr/>
+          <p:nvPr/>
+        </p:nvSpPr>
+        <p:spPr>
+          <a:xfrm>
+            <a:off x="3291840" y="2331720"/>
+            <a:ext cx="2651760" cy="310896"/>
+          </a:xfrm>
+          <a:prstGeom prst="roundRect">
+            <a:avLst/>
+          </a:prstGeom>
+          <a:solidFill>
+            <a:srgbClr val="1B2A41"/>
+          </a:solidFill>
+          <a:ln w="15875">
+            <a:solidFill>
+              <a:srgbClr val="0E7C7B"/>
+            </a:solidFill>
+          </a:ln>
+        </p:spPr>
+        <p:style>
+          <a:lnRef idx="1">
+            <a:schemeClr val="accent1"/>
+          </a:lnRef>
+          <a:fillRef idx="3">
+            <a:schemeClr val="accent1"/>
+          </a:fillRef>
+          <a:effectRef idx="2">
+            <a:schemeClr val="accent1"/>
+          </a:effectRef>
+          <a:fontRef idx="minor">
+            <a:schemeClr val="lt1"/>
+          </a:fontRef>
+        </p:style>
+        <p:txBody>
+          <a:bodyPr rtlCol="0" anchor="ctr" wrap="square"/>
+          <a:lstStyle/>
+          <a:p>
+            <a:pPr algn="ctr"/>
+            <a:r>
+              <a:rPr sz="1150" b="1">
+                <a:solidFill>
+                  <a:srgbClr val="FAF7F0"/>
+                </a:solidFill>
+                <a:latin typeface="Menlo"/>
+              </a:rPr>
+              <a:t>ROOT (day)</a:t>
+            </a:r>
+          </a:p>
+        </p:txBody>
+      </p:sp>
+      <p:sp>
+        <p:nvSpPr>
+          <p:cNvPr id="24" name="TextBox 23"/>
+          <p:cNvSpPr txBox="1"/>
+          <p:nvPr/>
+        </p:nvSpPr>
+        <p:spPr>
+          <a:xfrm>
+            <a:off x="3401568" y="2679191"/>
+            <a:ext cx="2468879" cy="237744"/>
+          </a:xfrm>
+          <a:prstGeom prst="rect">
+            <a:avLst/>
+          </a:prstGeom>
+          <a:noFill/>
+        </p:spPr>
+        <p:txBody>
+          <a:bodyPr wrap="square">
+            <a:spAutoFit/>
+          </a:bodyPr>
+          <a:lstStyle/>
+          <a:p>
+            <a:pPr algn="l"/>
+            <a:r>
+              <a:rPr sz="1100" b="0" i="0">
+                <a:solidFill>
+                  <a:srgbClr val="0E7C7B"/>
+                </a:solidFill>
+                <a:latin typeface="Menlo"/>
+              </a:rPr>
+              <a:t>6a3f…d208</a:t>
+            </a:r>
+          </a:p>
+        </p:txBody>
+      </p:sp>
+      <p:cxnSp>
+        <p:nvCxnSpPr>
+          <p:cNvPr id="25" name="Connector 24"/>
+          <p:cNvCxnSpPr/>
+          <p:nvPr/>
+        </p:nvCxnSpPr>
+        <p:spPr>
+          <a:xfrm flipV="1">
+            <a:off x="1645920" y="4480560"/>
+            <a:ext cx="822960" cy="411480"/>
+          </a:xfrm>
+          <a:prstGeom prst="line">
+            <a:avLst/>
+          </a:prstGeom>
+          <a:ln w="25400">
+            <a:solidFill>
+              <a:srgbClr val="1B2A41"/>
+            </a:solidFill>
+            <a:tailEnd type="arrow"/>
+          </a:ln>
+        </p:spPr>
+        <p:style>
+          <a:lnRef idx="2">
+            <a:schemeClr val="accent1"/>
+          </a:lnRef>
+          <a:fillRef idx="0">
+            <a:schemeClr val="accent1"/>
+          </a:fillRef>
+          <a:effectRef idx="1">
+            <a:schemeClr val="accent1"/>
+          </a:effectRef>
+          <a:fontRef idx="minor">
+            <a:schemeClr val="tx1"/>
+          </a:fontRef>
+        </p:style>
+      </p:cxnSp>
+      <p:cxnSp>
+        <p:nvCxnSpPr>
+          <p:cNvPr id="26" name="Connector 25"/>
+          <p:cNvCxnSpPr/>
+          <p:nvPr/>
+        </p:nvCxnSpPr>
+        <p:spPr>
+          <a:xfrm flipH="1" flipV="1">
+            <a:off x="3383280" y="4480560"/>
+            <a:ext cx="822960" cy="411480"/>
+          </a:xfrm>
+          <a:prstGeom prst="line">
+            <a:avLst/>
+          </a:prstGeom>
+          <a:ln w="25400">
+            <a:solidFill>
+              <a:srgbClr val="1B2A41"/>
+            </a:solidFill>
+            <a:tailEnd type="arrow"/>
+          </a:ln>
+        </p:spPr>
+        <p:style>
+          <a:lnRef idx="2">
+            <a:schemeClr val="accent1"/>
+          </a:lnRef>
+          <a:fillRef idx="0">
+            <a:schemeClr val="accent1"/>
+          </a:fillRef>
+          <a:effectRef idx="1">
+            <a:schemeClr val="accent1"/>
+          </a:effectRef>
+          <a:fontRef idx="minor">
+            <a:schemeClr val="tx1"/>
+          </a:fontRef>
+        </p:style>
+      </p:cxnSp>
+      <p:cxnSp>
+        <p:nvCxnSpPr>
+          <p:cNvPr id="27" name="Connector 26"/>
+          <p:cNvCxnSpPr/>
+          <p:nvPr/>
+        </p:nvCxnSpPr>
+        <p:spPr>
+          <a:xfrm flipH="1" flipV="1">
+            <a:off x="6126480" y="4480560"/>
+            <a:ext cx="640080" cy="411480"/>
+          </a:xfrm>
+          <a:prstGeom prst="line">
+            <a:avLst/>
+          </a:prstGeom>
+          <a:ln w="25400">
+            <a:solidFill>
+              <a:srgbClr val="1B2A41"/>
+            </a:solidFill>
+            <a:tailEnd type="arrow"/>
+          </a:ln>
+        </p:spPr>
+        <p:style>
+          <a:lnRef idx="2">
+            <a:schemeClr val="accent1"/>
+          </a:lnRef>
+          <a:fillRef idx="0">
+            <a:schemeClr val="accent1"/>
+          </a:fillRef>
+          <a:effectRef idx="1">
+            <a:schemeClr val="accent1"/>
+          </a:effectRef>
+          <a:fontRef idx="minor">
+            <a:schemeClr val="tx1"/>
+          </a:fontRef>
+        </p:style>
+      </p:cxnSp>
+      <p:cxnSp>
+        <p:nvCxnSpPr>
+          <p:cNvPr id="28" name="Connector 27"/>
+          <p:cNvCxnSpPr/>
+          <p:nvPr/>
+        </p:nvCxnSpPr>
+        <p:spPr>
+          <a:xfrm flipV="1">
+            <a:off x="2926080" y="3108960"/>
+            <a:ext cx="1188720" cy="548640"/>
+          </a:xfrm>
+          <a:prstGeom prst="line">
+            <a:avLst/>
+          </a:prstGeom>
+          <a:ln w="25400">
+            <a:solidFill>
+              <a:srgbClr val="1B2A41"/>
+            </a:solidFill>
+            <a:tailEnd type="arrow"/>
+          </a:ln>
+        </p:spPr>
+        <p:style>
+          <a:lnRef idx="2">
+            <a:schemeClr val="accent1"/>
+          </a:lnRef>
+          <a:fillRef idx="0">
+            <a:schemeClr val="accent1"/>
+          </a:fillRef>
+          <a:effectRef idx="1">
+            <a:schemeClr val="accent1"/>
+          </a:effectRef>
+          <a:fontRef idx="minor">
+            <a:schemeClr val="tx1"/>
+          </a:fontRef>
+        </p:style>
+      </p:cxnSp>
+      <p:cxnSp>
+        <p:nvCxnSpPr>
+          <p:cNvPr id="29" name="Connector 28"/>
+          <p:cNvCxnSpPr/>
+          <p:nvPr/>
+        </p:nvCxnSpPr>
+        <p:spPr>
+          <a:xfrm flipH="1" flipV="1">
+            <a:off x="5029200" y="3108960"/>
+            <a:ext cx="1097280" cy="548640"/>
+          </a:xfrm>
+          <a:prstGeom prst="line">
+            <a:avLst/>
+          </a:prstGeom>
+          <a:ln w="25400">
+            <a:solidFill>
+              <a:srgbClr val="1B2A41"/>
+            </a:solidFill>
+            <a:tailEnd type="arrow"/>
+          </a:ln>
+        </p:spPr>
+        <p:style>
+          <a:lnRef idx="2">
+            <a:schemeClr val="accent1"/>
+          </a:lnRef>
+          <a:fillRef idx="0">
+            <a:schemeClr val="accent1"/>
+          </a:fillRef>
+          <a:effectRef idx="1">
+            <a:schemeClr val="accent1"/>
+          </a:effectRef>
+          <a:fontRef idx="minor">
+            <a:schemeClr val="tx1"/>
+          </a:fontRef>
+        </p:style>
+      </p:cxnSp>
+      <p:sp>
+        <p:nvSpPr>
+          <p:cNvPr id="30" name="Rounded Rectangle 29"/>
+          <p:cNvSpPr/>
+          <p:nvPr/>
+        </p:nvSpPr>
+        <p:spPr>
+          <a:xfrm>
+            <a:off x="6949440" y="1554480"/>
+            <a:ext cx="4754880" cy="1335024"/>
           </a:xfrm>
           <a:prstGeom prst="roundRect">
             <a:avLst/>
@@ -5343,418 +7486,19 @@
           <a:lstStyle/>
           <a:p>
             <a:pPr algn="ctr"/>
-            <a:r>
-              <a:rPr sz="1300" b="0">
-                <a:solidFill>
-                  <a:srgbClr val="1B2A41"/>
-                </a:solidFill>
-                <a:latin typeface="Menlo"/>
-              </a:rPr>
-              <a:t>H4</a:t>
-            </a:r>
-          </a:p>
-        </p:txBody>
-      </p:sp>
-      <p:sp>
-        <p:nvSpPr>
-          <p:cNvPr id="8" name="Rounded Rectangle 7"/>
+          </a:p>
+        </p:txBody>
+      </p:sp>
+      <p:sp>
+        <p:nvSpPr>
+          <p:cNvPr id="31" name="Rounded Rectangle 30"/>
           <p:cNvSpPr/>
           <p:nvPr/>
         </p:nvSpPr>
         <p:spPr>
           <a:xfrm>
-            <a:off x="1965960" y="3703320"/>
-            <a:ext cx="1737360" cy="685800"/>
-          </a:xfrm>
-          <a:prstGeom prst="roundRect">
-            <a:avLst/>
-          </a:prstGeom>
-          <a:solidFill>
-            <a:srgbClr val="E7EEF2"/>
-          </a:solidFill>
-          <a:ln w="15875">
-            <a:solidFill>
-              <a:srgbClr val="1B2A41"/>
-            </a:solidFill>
-          </a:ln>
-        </p:spPr>
-        <p:style>
-          <a:lnRef idx="1">
-            <a:schemeClr val="accent1"/>
-          </a:lnRef>
-          <a:fillRef idx="3">
-            <a:schemeClr val="accent1"/>
-          </a:fillRef>
-          <a:effectRef idx="2">
-            <a:schemeClr val="accent1"/>
-          </a:effectRef>
-          <a:fontRef idx="minor">
-            <a:schemeClr val="lt1"/>
-          </a:fontRef>
-        </p:style>
-        <p:txBody>
-          <a:bodyPr rtlCol="0" anchor="ctr" wrap="square"/>
-          <a:lstStyle/>
-          <a:p>
-            <a:pPr algn="ctr"/>
-            <a:r>
-              <a:rPr sz="1100" b="0">
-                <a:solidFill>
-                  <a:srgbClr val="1B2A41"/>
-                </a:solidFill>
-                <a:latin typeface="Menlo"/>
-              </a:rPr>
-              <a:t>H12 = h(H1|H2)</a:t>
-            </a:r>
-          </a:p>
-        </p:txBody>
-      </p:sp>
-      <p:sp>
-        <p:nvSpPr>
-          <p:cNvPr id="9" name="Rounded Rectangle 8"/>
-          <p:cNvSpPr/>
-          <p:nvPr/>
-        </p:nvSpPr>
-        <p:spPr>
-          <a:xfrm>
-            <a:off x="6172200" y="3703320"/>
-            <a:ext cx="1737360" cy="685800"/>
-          </a:xfrm>
-          <a:prstGeom prst="roundRect">
-            <a:avLst/>
-          </a:prstGeom>
-          <a:solidFill>
-            <a:srgbClr val="E7EEF2"/>
-          </a:solidFill>
-          <a:ln w="15875">
-            <a:solidFill>
-              <a:srgbClr val="1B2A41"/>
-            </a:solidFill>
-          </a:ln>
-        </p:spPr>
-        <p:style>
-          <a:lnRef idx="1">
-            <a:schemeClr val="accent1"/>
-          </a:lnRef>
-          <a:fillRef idx="3">
-            <a:schemeClr val="accent1"/>
-          </a:fillRef>
-          <a:effectRef idx="2">
-            <a:schemeClr val="accent1"/>
-          </a:effectRef>
-          <a:fontRef idx="minor">
-            <a:schemeClr val="lt1"/>
-          </a:fontRef>
-        </p:style>
-        <p:txBody>
-          <a:bodyPr rtlCol="0" anchor="ctr" wrap="square"/>
-          <a:lstStyle/>
-          <a:p>
-            <a:pPr algn="ctr"/>
-            <a:r>
-              <a:rPr sz="1100" b="0">
-                <a:solidFill>
-                  <a:srgbClr val="1B2A41"/>
-                </a:solidFill>
-                <a:latin typeface="Menlo"/>
-              </a:rPr>
-              <a:t>H34 = h(H3|H4)</a:t>
-            </a:r>
-          </a:p>
-        </p:txBody>
-      </p:sp>
-      <p:sp>
-        <p:nvSpPr>
-          <p:cNvPr id="10" name="Rounded Rectangle 9"/>
-          <p:cNvSpPr/>
-          <p:nvPr/>
-        </p:nvSpPr>
-        <p:spPr>
-          <a:xfrm>
-            <a:off x="4069080" y="2468880"/>
-            <a:ext cx="1737360" cy="777240"/>
-          </a:xfrm>
-          <a:prstGeom prst="roundRect">
-            <a:avLst/>
-          </a:prstGeom>
-          <a:solidFill>
-            <a:srgbClr val="E7EEF2"/>
-          </a:solidFill>
-          <a:ln w="15875">
-            <a:solidFill>
-              <a:srgbClr val="0E7C7B"/>
-            </a:solidFill>
-          </a:ln>
-        </p:spPr>
-        <p:style>
-          <a:lnRef idx="1">
-            <a:schemeClr val="accent1"/>
-          </a:lnRef>
-          <a:fillRef idx="3">
-            <a:schemeClr val="accent1"/>
-          </a:fillRef>
-          <a:effectRef idx="2">
-            <a:schemeClr val="accent1"/>
-          </a:effectRef>
-          <a:fontRef idx="minor">
-            <a:schemeClr val="lt1"/>
-          </a:fontRef>
-        </p:style>
-        <p:txBody>
-          <a:bodyPr rtlCol="0" anchor="ctr" wrap="square"/>
-          <a:lstStyle/>
-          <a:p>
-            <a:pPr algn="ctr"/>
-            <a:r>
-              <a:rPr sz="1200" b="1">
-                <a:solidFill>
-                  <a:srgbClr val="1B2A41"/>
-                </a:solidFill>
-                <a:latin typeface="Menlo"/>
-              </a:rPr>
-              <a:t>ROOT</a:t>
-            </a:r>
-          </a:p>
-          <a:p>
-            <a:pPr algn="ctr"/>
-            <a:r>
-              <a:rPr sz="1200" b="1">
-                <a:solidFill>
-                  <a:srgbClr val="1B2A41"/>
-                </a:solidFill>
-                <a:latin typeface="Avenir Next"/>
-              </a:rPr>
-              <a:t>h(H12|H34)</a:t>
-            </a:r>
-          </a:p>
-        </p:txBody>
-      </p:sp>
-      <p:cxnSp>
-        <p:nvCxnSpPr>
-          <p:cNvPr id="11" name="Connector 10"/>
-          <p:cNvCxnSpPr/>
-          <p:nvPr/>
-        </p:nvCxnSpPr>
-        <p:spPr>
-          <a:xfrm flipV="1">
-            <a:off x="1783080" y="4389120"/>
-            <a:ext cx="868680" cy="548640"/>
-          </a:xfrm>
-          <a:prstGeom prst="line">
-            <a:avLst/>
-          </a:prstGeom>
-          <a:ln w="22225">
-            <a:solidFill>
-              <a:srgbClr val="1B2A41"/>
-            </a:solidFill>
-            <a:tailEnd type="arrow"/>
-          </a:ln>
-        </p:spPr>
-        <p:style>
-          <a:lnRef idx="2">
-            <a:schemeClr val="accent1"/>
-          </a:lnRef>
-          <a:fillRef idx="0">
-            <a:schemeClr val="accent1"/>
-          </a:fillRef>
-          <a:effectRef idx="1">
-            <a:schemeClr val="accent1"/>
-          </a:effectRef>
-          <a:fontRef idx="minor">
-            <a:schemeClr val="tx1"/>
-          </a:fontRef>
-        </p:style>
-      </p:cxnSp>
-      <p:cxnSp>
-        <p:nvCxnSpPr>
-          <p:cNvPr id="12" name="Connector 11"/>
-          <p:cNvCxnSpPr/>
-          <p:nvPr/>
-        </p:nvCxnSpPr>
-        <p:spPr>
-          <a:xfrm flipH="1" flipV="1">
-            <a:off x="3017520" y="4389120"/>
-            <a:ext cx="868680" cy="548640"/>
-          </a:xfrm>
-          <a:prstGeom prst="line">
-            <a:avLst/>
-          </a:prstGeom>
-          <a:ln w="22225">
-            <a:solidFill>
-              <a:srgbClr val="1B2A41"/>
-            </a:solidFill>
-            <a:tailEnd type="arrow"/>
-          </a:ln>
-        </p:spPr>
-        <p:style>
-          <a:lnRef idx="2">
-            <a:schemeClr val="accent1"/>
-          </a:lnRef>
-          <a:fillRef idx="0">
-            <a:schemeClr val="accent1"/>
-          </a:fillRef>
-          <a:effectRef idx="1">
-            <a:schemeClr val="accent1"/>
-          </a:effectRef>
-          <a:fontRef idx="minor">
-            <a:schemeClr val="tx1"/>
-          </a:fontRef>
-        </p:style>
-      </p:cxnSp>
-      <p:cxnSp>
-        <p:nvCxnSpPr>
-          <p:cNvPr id="13" name="Connector 12"/>
-          <p:cNvCxnSpPr/>
-          <p:nvPr/>
-        </p:nvCxnSpPr>
-        <p:spPr>
-          <a:xfrm flipV="1">
-            <a:off x="5989320" y="4389120"/>
-            <a:ext cx="868680" cy="548640"/>
-          </a:xfrm>
-          <a:prstGeom prst="line">
-            <a:avLst/>
-          </a:prstGeom>
-          <a:ln w="22225">
-            <a:solidFill>
-              <a:srgbClr val="1B2A41"/>
-            </a:solidFill>
-            <a:tailEnd type="arrow"/>
-          </a:ln>
-        </p:spPr>
-        <p:style>
-          <a:lnRef idx="2">
-            <a:schemeClr val="accent1"/>
-          </a:lnRef>
-          <a:fillRef idx="0">
-            <a:schemeClr val="accent1"/>
-          </a:fillRef>
-          <a:effectRef idx="1">
-            <a:schemeClr val="accent1"/>
-          </a:effectRef>
-          <a:fontRef idx="minor">
-            <a:schemeClr val="tx1"/>
-          </a:fontRef>
-        </p:style>
-      </p:cxnSp>
-      <p:cxnSp>
-        <p:nvCxnSpPr>
-          <p:cNvPr id="14" name="Connector 13"/>
-          <p:cNvCxnSpPr/>
-          <p:nvPr/>
-        </p:nvCxnSpPr>
-        <p:spPr>
-          <a:xfrm flipH="1" flipV="1">
-            <a:off x="7223760" y="4389120"/>
-            <a:ext cx="868680" cy="548640"/>
-          </a:xfrm>
-          <a:prstGeom prst="line">
-            <a:avLst/>
-          </a:prstGeom>
-          <a:ln w="22225">
-            <a:solidFill>
-              <a:srgbClr val="1B2A41"/>
-            </a:solidFill>
-            <a:tailEnd type="arrow"/>
-          </a:ln>
-        </p:spPr>
-        <p:style>
-          <a:lnRef idx="2">
-            <a:schemeClr val="accent1"/>
-          </a:lnRef>
-          <a:fillRef idx="0">
-            <a:schemeClr val="accent1"/>
-          </a:fillRef>
-          <a:effectRef idx="1">
-            <a:schemeClr val="accent1"/>
-          </a:effectRef>
-          <a:fontRef idx="minor">
-            <a:schemeClr val="tx1"/>
-          </a:fontRef>
-        </p:style>
-      </p:cxnSp>
-      <p:cxnSp>
-        <p:nvCxnSpPr>
-          <p:cNvPr id="15" name="Connector 14"/>
-          <p:cNvCxnSpPr/>
-          <p:nvPr/>
-        </p:nvCxnSpPr>
-        <p:spPr>
-          <a:xfrm flipV="1">
-            <a:off x="2834640" y="3246120"/>
-            <a:ext cx="1645920" cy="457200"/>
-          </a:xfrm>
-          <a:prstGeom prst="line">
-            <a:avLst/>
-          </a:prstGeom>
-          <a:ln w="22225">
-            <a:solidFill>
-              <a:srgbClr val="1B2A41"/>
-            </a:solidFill>
-            <a:tailEnd type="arrow"/>
-          </a:ln>
-        </p:spPr>
-        <p:style>
-          <a:lnRef idx="2">
-            <a:schemeClr val="accent1"/>
-          </a:lnRef>
-          <a:fillRef idx="0">
-            <a:schemeClr val="accent1"/>
-          </a:fillRef>
-          <a:effectRef idx="1">
-            <a:schemeClr val="accent1"/>
-          </a:effectRef>
-          <a:fontRef idx="minor">
-            <a:schemeClr val="tx1"/>
-          </a:fontRef>
-        </p:style>
-      </p:cxnSp>
-      <p:cxnSp>
-        <p:nvCxnSpPr>
-          <p:cNvPr id="16" name="Connector 15"/>
-          <p:cNvCxnSpPr/>
-          <p:nvPr/>
-        </p:nvCxnSpPr>
-        <p:spPr>
-          <a:xfrm flipH="1" flipV="1">
-            <a:off x="5394960" y="3246120"/>
-            <a:ext cx="1645920" cy="457200"/>
-          </a:xfrm>
-          <a:prstGeom prst="line">
-            <a:avLst/>
-          </a:prstGeom>
-          <a:ln w="22225">
-            <a:solidFill>
-              <a:srgbClr val="1B2A41"/>
-            </a:solidFill>
-            <a:tailEnd type="arrow"/>
-          </a:ln>
-        </p:spPr>
-        <p:style>
-          <a:lnRef idx="2">
-            <a:schemeClr val="accent1"/>
-          </a:lnRef>
-          <a:fillRef idx="0">
-            <a:schemeClr val="accent1"/>
-          </a:fillRef>
-          <a:effectRef idx="1">
-            <a:schemeClr val="accent1"/>
-          </a:effectRef>
-          <a:fontRef idx="minor">
-            <a:schemeClr val="tx1"/>
-          </a:fontRef>
-        </p:style>
-      </p:cxnSp>
-      <p:sp>
-        <p:nvSpPr>
-          <p:cNvPr id="17" name="Rounded Rectangle 16"/>
-          <p:cNvSpPr/>
-          <p:nvPr/>
-        </p:nvSpPr>
-        <p:spPr>
-          <a:xfrm>
-            <a:off x="8869680" y="2377440"/>
-            <a:ext cx="2743200" cy="960120"/>
+            <a:off x="6949440" y="1554480"/>
+            <a:ext cx="4754880" cy="310896"/>
           </a:xfrm>
           <a:prstGeom prst="roundRect">
             <a:avLst/>
@@ -5788,51 +7532,167 @@
           <a:p>
             <a:pPr algn="ctr"/>
             <a:r>
-              <a:rPr sz="1200" b="1">
+              <a:rPr sz="1150" b="1">
                 <a:solidFill>
                   <a:srgbClr val="FAF7F0"/>
                 </a:solidFill>
                 <a:latin typeface="Menlo"/>
               </a:rPr>
-              <a:t>HSM signs the root</a:t>
-            </a:r>
-          </a:p>
-          <a:p>
-            <a:pPr algn="ctr"/>
-            <a:r>
-              <a:rPr sz="1200" b="1">
-                <a:solidFill>
-                  <a:srgbClr val="FAF7F0"/>
-                </a:solidFill>
-                <a:latin typeface="Avenir Next"/>
-              </a:rPr>
-              <a:t>(key never leaves</a:t>
-            </a:r>
-          </a:p>
-          <a:p>
-            <a:pPr algn="ctr"/>
-            <a:r>
-              <a:rPr sz="1200" b="1">
-                <a:solidFill>
-                  <a:srgbClr val="FAF7F0"/>
-                </a:solidFill>
-                <a:latin typeface="Avenir Next"/>
-              </a:rPr>
-              <a:t>the hardware)</a:t>
+              <a:t>SEAL  S-2025-05-23  (published T+0)</a:t>
+            </a:r>
+          </a:p>
+        </p:txBody>
+      </p:sp>
+      <p:sp>
+        <p:nvSpPr>
+          <p:cNvPr id="32" name="TextBox 31"/>
+          <p:cNvSpPr txBox="1"/>
+          <p:nvPr/>
+        </p:nvSpPr>
+        <p:spPr>
+          <a:xfrm>
+            <a:off x="7059168" y="1901952"/>
+            <a:ext cx="4572000" cy="237744"/>
+          </a:xfrm>
+          <a:prstGeom prst="rect">
+            <a:avLst/>
+          </a:prstGeom>
+          <a:noFill/>
+        </p:spPr>
+        <p:txBody>
+          <a:bodyPr wrap="square">
+            <a:spAutoFit/>
+          </a:bodyPr>
+          <a:lstStyle/>
+          <a:p>
+            <a:pPr algn="l"/>
+            <a:r>
+              <a:rPr sz="1050" b="0" i="0">
+                <a:solidFill>
+                  <a:srgbClr val="0E7C7B"/>
+                </a:solidFill>
+                <a:latin typeface="Menlo"/>
+              </a:rPr>
+              <a:t>root      : 6a3f…d208   ◄ the tree root</a:t>
+            </a:r>
+          </a:p>
+        </p:txBody>
+      </p:sp>
+      <p:sp>
+        <p:nvSpPr>
+          <p:cNvPr id="33" name="TextBox 32"/>
+          <p:cNvSpPr txBox="1"/>
+          <p:nvPr/>
+        </p:nvSpPr>
+        <p:spPr>
+          <a:xfrm>
+            <a:off x="7059168" y="2139696"/>
+            <a:ext cx="4572000" cy="237744"/>
+          </a:xfrm>
+          <a:prstGeom prst="rect">
+            <a:avLst/>
+          </a:prstGeom>
+          <a:noFill/>
+        </p:spPr>
+        <p:txBody>
+          <a:bodyPr wrap="square">
+            <a:spAutoFit/>
+          </a:bodyPr>
+          <a:lstStyle/>
+          <a:p>
+            <a:pPr algn="l"/>
+            <a:r>
+              <a:rPr sz="1050" b="0" i="0">
+                <a:solidFill>
+                  <a:srgbClr val="1B2A41"/>
+                </a:solidFill>
+                <a:latin typeface="Menlo"/>
+              </a:rPr>
+              <a:t>signed_by : hsm-seal-01 (key never leaves HW)</a:t>
+            </a:r>
+          </a:p>
+        </p:txBody>
+      </p:sp>
+      <p:sp>
+        <p:nvSpPr>
+          <p:cNvPr id="34" name="TextBox 33"/>
+          <p:cNvSpPr txBox="1"/>
+          <p:nvPr/>
+        </p:nvSpPr>
+        <p:spPr>
+          <a:xfrm>
+            <a:off x="7059168" y="2377439"/>
+            <a:ext cx="4572000" cy="237744"/>
+          </a:xfrm>
+          <a:prstGeom prst="rect">
+            <a:avLst/>
+          </a:prstGeom>
+          <a:noFill/>
+        </p:spPr>
+        <p:txBody>
+          <a:bodyPr wrap="square">
+            <a:spAutoFit/>
+          </a:bodyPr>
+          <a:lstStyle/>
+          <a:p>
+            <a:pPr algn="l"/>
+            <a:r>
+              <a:rPr sz="1050" b="0" i="0">
+                <a:solidFill>
+                  <a:srgbClr val="1B2A41"/>
+                </a:solidFill>
+                <a:latin typeface="Menlo"/>
+              </a:rPr>
+              <a:t>sig       : ed25519:74bb…0e91</a:t>
+            </a:r>
+          </a:p>
+        </p:txBody>
+      </p:sp>
+      <p:sp>
+        <p:nvSpPr>
+          <p:cNvPr id="35" name="TextBox 34"/>
+          <p:cNvSpPr txBox="1"/>
+          <p:nvPr/>
+        </p:nvSpPr>
+        <p:spPr>
+          <a:xfrm>
+            <a:off x="7059168" y="2615183"/>
+            <a:ext cx="4572000" cy="237744"/>
+          </a:xfrm>
+          <a:prstGeom prst="rect">
+            <a:avLst/>
+          </a:prstGeom>
+          <a:noFill/>
+        </p:spPr>
+        <p:txBody>
+          <a:bodyPr wrap="square">
+            <a:spAutoFit/>
+          </a:bodyPr>
+          <a:lstStyle/>
+          <a:p>
+            <a:pPr algn="l"/>
+            <a:r>
+              <a:rPr sz="1050" b="0" i="0">
+                <a:solidFill>
+                  <a:srgbClr val="1B2A41"/>
+                </a:solidFill>
+                <a:latin typeface="Menlo"/>
+              </a:rPr>
+              <a:t>published : external log, 2025-05-23</a:t>
             </a:r>
           </a:p>
         </p:txBody>
       </p:sp>
       <p:cxnSp>
         <p:nvCxnSpPr>
-          <p:cNvPr id="18" name="Connector 17"/>
+          <p:cNvPr id="36" name="Connector 35"/>
           <p:cNvCxnSpPr/>
           <p:nvPr/>
         </p:nvCxnSpPr>
         <p:spPr>
-          <a:xfrm>
-            <a:off x="5806440" y="2834640"/>
-            <a:ext cx="3063240" cy="0"/>
+          <a:xfrm flipV="1">
+            <a:off x="5943600" y="2468880"/>
+            <a:ext cx="1005840" cy="228600"/>
           </a:xfrm>
           <a:prstGeom prst="line">
             <a:avLst/>
@@ -5861,128 +7721,14 @@
       </p:cxnSp>
       <p:sp>
         <p:nvSpPr>
-          <p:cNvPr id="19" name="Rounded Rectangle 18"/>
-          <p:cNvSpPr/>
-          <p:nvPr/>
-        </p:nvSpPr>
-        <p:spPr>
-          <a:xfrm>
-            <a:off x="8869680" y="3749039"/>
-            <a:ext cx="2743200" cy="960120"/>
-          </a:xfrm>
-          <a:prstGeom prst="roundRect">
-            <a:avLst/>
-          </a:prstGeom>
-          <a:solidFill>
-            <a:srgbClr val="E7EEF2"/>
-          </a:solidFill>
-          <a:ln w="15875">
-            <a:solidFill>
-              <a:srgbClr val="0E7C7B"/>
-            </a:solidFill>
-          </a:ln>
-        </p:spPr>
-        <p:style>
-          <a:lnRef idx="1">
-            <a:schemeClr val="accent1"/>
-          </a:lnRef>
-          <a:fillRef idx="3">
-            <a:schemeClr val="accent1"/>
-          </a:fillRef>
-          <a:effectRef idx="2">
-            <a:schemeClr val="accent1"/>
-          </a:effectRef>
-          <a:fontRef idx="minor">
-            <a:schemeClr val="lt1"/>
-          </a:fontRef>
-        </p:style>
-        <p:txBody>
-          <a:bodyPr rtlCol="0" anchor="ctr" wrap="square"/>
-          <a:lstStyle/>
-          <a:p>
-            <a:pPr algn="ctr"/>
-            <a:r>
-              <a:rPr sz="1200" b="0">
-                <a:solidFill>
-                  <a:srgbClr val="1B2A41"/>
-                </a:solidFill>
-                <a:latin typeface="Avenir Next"/>
-              </a:rPr>
-              <a:t>Published externally</a:t>
-            </a:r>
-          </a:p>
-          <a:p>
-            <a:pPr algn="ctr"/>
-            <a:r>
-              <a:rPr sz="1200" b="0">
-                <a:solidFill>
-                  <a:srgbClr val="1B2A41"/>
-                </a:solidFill>
-                <a:latin typeface="Avenir Next"/>
-              </a:rPr>
-              <a:t>(a place the bank's</a:t>
-            </a:r>
-          </a:p>
-          <a:p>
-            <a:pPr algn="ctr"/>
-            <a:r>
-              <a:rPr sz="1200" b="0">
-                <a:solidFill>
-                  <a:srgbClr val="1B2A41"/>
-                </a:solidFill>
-                <a:latin typeface="Avenir Next"/>
-              </a:rPr>
-              <a:t>own accounts can't edit)</a:t>
-            </a:r>
-          </a:p>
-        </p:txBody>
-      </p:sp>
-      <p:cxnSp>
-        <p:nvCxnSpPr>
-          <p:cNvPr id="20" name="Connector 19"/>
-          <p:cNvCxnSpPr/>
-          <p:nvPr/>
-        </p:nvCxnSpPr>
-        <p:spPr>
-          <a:xfrm>
-            <a:off x="10241280" y="3337560"/>
-            <a:ext cx="0" cy="411479"/>
-          </a:xfrm>
-          <a:prstGeom prst="line">
-            <a:avLst/>
-          </a:prstGeom>
-          <a:ln w="28575">
-            <a:solidFill>
-              <a:srgbClr val="0E7C7B"/>
-            </a:solidFill>
-            <a:tailEnd type="arrow"/>
-          </a:ln>
-        </p:spPr>
-        <p:style>
-          <a:lnRef idx="2">
-            <a:schemeClr val="accent1"/>
-          </a:lnRef>
-          <a:fillRef idx="0">
-            <a:schemeClr val="accent1"/>
-          </a:fillRef>
-          <a:effectRef idx="1">
-            <a:schemeClr val="accent1"/>
-          </a:effectRef>
-          <a:fontRef idx="minor">
-            <a:schemeClr val="tx1"/>
-          </a:fontRef>
-        </p:style>
-      </p:cxnSp>
-      <p:sp>
-        <p:nvSpPr>
-          <p:cNvPr id="21" name="TextBox 20"/>
+          <p:cNvPr id="37" name="TextBox 36"/>
           <p:cNvSpPr txBox="1"/>
           <p:nvPr/>
         </p:nvSpPr>
         <p:spPr>
           <a:xfrm>
-            <a:off x="731520" y="5897880"/>
-            <a:ext cx="10972800" cy="640080"/>
+            <a:off x="6949440" y="3429000"/>
+            <a:ext cx="4846320" cy="1463040"/>
           </a:xfrm>
           <a:prstGeom prst="rect">
             <a:avLst/>
@@ -5997,13 +7743,49 @@
           <a:p>
             <a:pPr algn="l"/>
             <a:r>
-              <a:rPr sz="1500" b="0" i="1">
+              <a:rPr sz="1300" b="0" i="1">
                 <a:solidFill>
                   <a:srgbClr val="1B2A41"/>
                 </a:solidFill>
                 <a:latin typeface="Avenir Next"/>
               </a:rPr>
-              <a:t>That signed, published root is the daily seal — a one-way door closing behind the day's evidence.</a:t>
+              <a:t>The signed, published root is the daily</a:t>
+            </a:r>
+          </a:p>
+          <a:p>
+            <a:pPr algn="l"/>
+            <a:r>
+              <a:rPr sz="1300" b="0" i="1">
+                <a:solidFill>
+                  <a:srgbClr val="1B2A41"/>
+                </a:solidFill>
+                <a:latin typeface="Avenir Next"/>
+              </a:rPr>
+              <a:t>seal — a one-way door closing behind</a:t>
+            </a:r>
+          </a:p>
+          <a:p>
+            <a:pPr algn="l"/>
+            <a:r>
+              <a:rPr sz="1300" b="0" i="1">
+                <a:solidFill>
+                  <a:srgbClr val="1B2A41"/>
+                </a:solidFill>
+                <a:latin typeface="Avenir Next"/>
+              </a:rPr>
+              <a:t>the day's evidence, held where the</a:t>
+            </a:r>
+          </a:p>
+          <a:p>
+            <a:pPr algn="l"/>
+            <a:r>
+              <a:rPr sz="1300" b="0" i="1">
+                <a:solidFill>
+                  <a:srgbClr val="1B2A41"/>
+                </a:solidFill>
+                <a:latin typeface="Avenir Next"/>
+              </a:rPr>
+              <a:t>institution's accounts can't reach.</a:t>
             </a:r>
           </a:p>
         </p:txBody>
@@ -6042,8 +7824,8 @@
         </p:nvSpPr>
         <p:spPr>
           <a:xfrm>
-            <a:off x="548640" y="320040"/>
-            <a:ext cx="11064240" cy="822960"/>
+            <a:off x="548640" y="274320"/>
+            <a:ext cx="11064240" cy="731520"/>
           </a:xfrm>
           <a:prstGeom prst="rect">
             <a:avLst/>
@@ -6058,7 +7840,7 @@
           <a:p>
             <a:pPr algn="l"/>
             <a:r>
-              <a:rPr sz="3000" b="1" i="0">
+              <a:rPr sz="2800" b="1" i="0">
                 <a:solidFill>
                   <a:srgbClr val="1B2A41"/>
                 </a:solidFill>
@@ -6077,7 +7859,7 @@
         </p:nvSpPr>
         <p:spPr>
           <a:xfrm>
-            <a:off x="548640" y="960120"/>
+            <a:off x="548640" y="868680"/>
             <a:ext cx="11064240" cy="457200"/>
           </a:xfrm>
           <a:prstGeom prst="rect">
@@ -6093,7 +7875,7 @@
           <a:p>
             <a:pPr algn="l"/>
             <a:r>
-              <a:rPr sz="1500" b="0" i="1">
+              <a:rPr sz="1400" b="0" i="1">
                 <a:solidFill>
                   <a:srgbClr val="6B7480"/>
                 </a:solidFill>
@@ -6112,8 +7894,8 @@
         </p:nvSpPr>
         <p:spPr>
           <a:xfrm>
-            <a:off x="731520" y="2103120"/>
-            <a:ext cx="4206240" cy="2651760"/>
+            <a:off x="548640" y="1600200"/>
+            <a:ext cx="5669280" cy="2286000"/>
           </a:xfrm>
           <a:prstGeom prst="roundRect">
             <a:avLst/>
@@ -6146,81 +7928,6 @@
           <a:lstStyle/>
           <a:p>
             <a:pPr algn="ctr"/>
-            <a:r>
-              <a:rPr sz="1300" b="0">
-                <a:solidFill>
-                  <a:srgbClr val="1B2A41"/>
-                </a:solidFill>
-                <a:latin typeface="Avenir Next"/>
-              </a:rPr>
-              <a:t>IKM key registry</a:t>
-            </a:r>
-          </a:p>
-          <a:p>
-            <a:pPr algn="ctr"/>
-          </a:p>
-          <a:p>
-            <a:pPr algn="ctr"/>
-            <a:r>
-              <a:rPr sz="1300" b="0">
-                <a:solidFill>
-                  <a:srgbClr val="1B2A41"/>
-                </a:solidFill>
-                <a:latin typeface="Avenir Next"/>
-              </a:rPr>
-              <a:t>key #12  valid 2026-01→</a:t>
-            </a:r>
-          </a:p>
-          <a:p>
-            <a:pPr algn="ctr"/>
-            <a:r>
-              <a:rPr sz="1300" b="0">
-                <a:solidFill>
-                  <a:srgbClr val="1B2A41"/>
-                </a:solidFill>
-                <a:latin typeface="Avenir Next"/>
-              </a:rPr>
-              <a:t>key #13  valid 2026-04→</a:t>
-            </a:r>
-          </a:p>
-          <a:p>
-            <a:pPr algn="ctr"/>
-            <a:r>
-              <a:rPr sz="1300" b="0">
-                <a:solidFill>
-                  <a:srgbClr val="1B2A41"/>
-                </a:solidFill>
-                <a:latin typeface="Avenir Next"/>
-              </a:rPr>
-              <a:t>key #14  valid 2026-07→</a:t>
-            </a:r>
-          </a:p>
-          <a:p>
-            <a:pPr algn="ctr"/>
-          </a:p>
-          <a:p>
-            <a:pPr algn="ctr"/>
-            <a:r>
-              <a:rPr sz="1300" b="0">
-                <a:solidFill>
-                  <a:srgbClr val="1B2A41"/>
-                </a:solidFill>
-                <a:latin typeface="Avenir Next"/>
-              </a:rPr>
-              <a:t>fingerprints, rotation dates,</a:t>
-            </a:r>
-          </a:p>
-          <a:p>
-            <a:pPr algn="ctr"/>
-            <a:r>
-              <a:rPr sz="1300" b="0">
-                <a:solidFill>
-                  <a:srgbClr val="1B2A41"/>
-                </a:solidFill>
-                <a:latin typeface="Avenir Next"/>
-              </a:rPr>
-              <a:t>role separation</a:t>
-            </a:r>
           </a:p>
         </p:txBody>
       </p:sp>
@@ -6232,8 +7939,8 @@
         </p:nvSpPr>
         <p:spPr>
           <a:xfrm>
-            <a:off x="5852160" y="2286000"/>
-            <a:ext cx="2651760" cy="914400"/>
+            <a:off x="548640" y="1600200"/>
+            <a:ext cx="5669280" cy="310896"/>
           </a:xfrm>
           <a:prstGeom prst="roundRect">
             <a:avLst/>
@@ -6267,189 +7974,27 @@
           <a:p>
             <a:pPr algn="ctr"/>
             <a:r>
-              <a:rPr sz="1200" b="1">
+              <a:rPr sz="1150" b="1">
                 <a:solidFill>
                   <a:srgbClr val="FAF7F0"/>
                 </a:solidFill>
                 <a:latin typeface="Menlo"/>
               </a:rPr>
-              <a:t>HSM signature</a:t>
-            </a:r>
-          </a:p>
-          <a:p>
-            <a:pPr algn="ctr"/>
-            <a:r>
-              <a:rPr sz="1200" b="1">
-                <a:solidFill>
-                  <a:srgbClr val="FAF7F0"/>
-                </a:solidFill>
-                <a:latin typeface="Avenir Next"/>
-              </a:rPr>
-              <a:t>over the manifest</a:t>
-            </a:r>
-          </a:p>
-        </p:txBody>
-      </p:sp>
-      <p:cxnSp>
-        <p:nvCxnSpPr>
-          <p:cNvPr id="6" name="Connector 5"/>
-          <p:cNvCxnSpPr/>
-          <p:nvPr/>
-        </p:nvCxnSpPr>
-        <p:spPr>
-          <a:xfrm>
-            <a:off x="4937760" y="2743200"/>
-            <a:ext cx="914400" cy="0"/>
-          </a:xfrm>
-          <a:prstGeom prst="line">
-            <a:avLst/>
-          </a:prstGeom>
-          <a:ln w="28575">
-            <a:solidFill>
-              <a:srgbClr val="0E7C7B"/>
-            </a:solidFill>
-            <a:tailEnd type="arrow"/>
-          </a:ln>
-        </p:spPr>
-        <p:style>
-          <a:lnRef idx="2">
-            <a:schemeClr val="accent1"/>
-          </a:lnRef>
-          <a:fillRef idx="0">
-            <a:schemeClr val="accent1"/>
-          </a:fillRef>
-          <a:effectRef idx="1">
-            <a:schemeClr val="accent1"/>
-          </a:effectRef>
-          <a:fontRef idx="minor">
-            <a:schemeClr val="tx1"/>
-          </a:fontRef>
-        </p:style>
-      </p:cxnSp>
-      <p:sp>
-        <p:nvSpPr>
-          <p:cNvPr id="7" name="Rounded Rectangle 6"/>
-          <p:cNvSpPr/>
-          <p:nvPr/>
-        </p:nvSpPr>
-        <p:spPr>
-          <a:xfrm>
-            <a:off x="9144000" y="2286000"/>
-            <a:ext cx="2468880" cy="914400"/>
-          </a:xfrm>
-          <a:prstGeom prst="roundRect">
-            <a:avLst/>
-          </a:prstGeom>
-          <a:solidFill>
-            <a:srgbClr val="E7EEF2"/>
-          </a:solidFill>
-          <a:ln w="15875">
-            <a:solidFill>
-              <a:srgbClr val="0E7C7B"/>
-            </a:solidFill>
-          </a:ln>
-        </p:spPr>
-        <p:style>
-          <a:lnRef idx="1">
-            <a:schemeClr val="accent1"/>
-          </a:lnRef>
-          <a:fillRef idx="3">
-            <a:schemeClr val="accent1"/>
-          </a:fillRef>
-          <a:effectRef idx="2">
-            <a:schemeClr val="accent1"/>
-          </a:effectRef>
-          <a:fontRef idx="minor">
-            <a:schemeClr val="lt1"/>
-          </a:fontRef>
-        </p:style>
-        <p:txBody>
-          <a:bodyPr rtlCol="0" anchor="ctr" wrap="square"/>
-          <a:lstStyle/>
-          <a:p>
-            <a:pPr algn="ctr"/>
-            <a:r>
-              <a:rPr sz="1100" b="0">
-                <a:solidFill>
-                  <a:srgbClr val="1B2A41"/>
-                </a:solidFill>
-                <a:latin typeface="Avenir Next"/>
-              </a:rPr>
-              <a:t>Examiner validates</a:t>
-            </a:r>
-          </a:p>
-          <a:p>
-            <a:pPr algn="ctr"/>
-            <a:r>
-              <a:rPr sz="1100" b="0">
-                <a:solidFill>
-                  <a:srgbClr val="1B2A41"/>
-                </a:solidFill>
-                <a:latin typeface="Avenir Next"/>
-              </a:rPr>
-              <a:t>against published root</a:t>
-            </a:r>
-          </a:p>
-          <a:p>
-            <a:pPr algn="ctr"/>
-            <a:r>
-              <a:rPr sz="1100" b="0">
-                <a:solidFill>
-                  <a:srgbClr val="1B2A41"/>
-                </a:solidFill>
-                <a:latin typeface="Avenir Next"/>
-              </a:rPr>
-              <a:t>with their OWN tooling</a:t>
-            </a:r>
-          </a:p>
-        </p:txBody>
-      </p:sp>
-      <p:cxnSp>
-        <p:nvCxnSpPr>
-          <p:cNvPr id="8" name="Connector 7"/>
-          <p:cNvCxnSpPr/>
-          <p:nvPr/>
-        </p:nvCxnSpPr>
-        <p:spPr>
-          <a:xfrm>
-            <a:off x="8503920" y="2743200"/>
-            <a:ext cx="640080" cy="0"/>
-          </a:xfrm>
-          <a:prstGeom prst="line">
-            <a:avLst/>
-          </a:prstGeom>
-          <a:ln w="28575">
-            <a:solidFill>
-              <a:srgbClr val="0E7C7B"/>
-            </a:solidFill>
-            <a:tailEnd type="arrow"/>
-          </a:ln>
-        </p:spPr>
-        <p:style>
-          <a:lnRef idx="2">
-            <a:schemeClr val="accent1"/>
-          </a:lnRef>
-          <a:fillRef idx="0">
-            <a:schemeClr val="accent1"/>
-          </a:fillRef>
-          <a:effectRef idx="1">
-            <a:schemeClr val="accent1"/>
-          </a:effectRef>
-          <a:fontRef idx="minor">
-            <a:schemeClr val="tx1"/>
-          </a:fontRef>
-        </p:style>
-      </p:cxnSp>
-      <p:sp>
-        <p:nvSpPr>
-          <p:cNvPr id="9" name="TextBox 8"/>
+              <a:t>KEY REGISTRY MANIFEST  (HSM-signed)</a:t>
+            </a:r>
+          </a:p>
+        </p:txBody>
+      </p:sp>
+      <p:sp>
+        <p:nvSpPr>
+          <p:cNvPr id="6" name="TextBox 5"/>
           <p:cNvSpPr txBox="1"/>
           <p:nvPr/>
         </p:nvSpPr>
         <p:spPr>
           <a:xfrm>
-            <a:off x="731520" y="5120640"/>
-            <a:ext cx="10972800" cy="1280160"/>
+            <a:off x="658368" y="1947672"/>
+            <a:ext cx="5486400" cy="237744"/>
           </a:xfrm>
           <a:prstGeom prst="rect">
             <a:avLst/>
@@ -6464,25 +8009,407 @@
           <a:p>
             <a:pPr algn="l"/>
             <a:r>
-              <a:rPr sz="1500" b="0" i="0">
+              <a:rPr sz="1050" b="0" i="0">
                 <a:solidFill>
                   <a:srgbClr val="1B2A41"/>
                 </a:solidFill>
+                <a:latin typeface="Menlo"/>
+              </a:rPr>
+              <a:t>manifest_root : m-88c2…511a</a:t>
+            </a:r>
+          </a:p>
+        </p:txBody>
+      </p:sp>
+      <p:sp>
+        <p:nvSpPr>
+          <p:cNvPr id="7" name="TextBox 6"/>
+          <p:cNvSpPr txBox="1"/>
+          <p:nvPr/>
+        </p:nvSpPr>
+        <p:spPr>
+          <a:xfrm>
+            <a:off x="658368" y="2185415"/>
+            <a:ext cx="5486400" cy="237744"/>
+          </a:xfrm>
+          <a:prstGeom prst="rect">
+            <a:avLst/>
+          </a:prstGeom>
+          <a:noFill/>
+        </p:spPr>
+        <p:txBody>
+          <a:bodyPr wrap="square">
+            <a:spAutoFit/>
+          </a:bodyPr>
+          <a:lstStyle/>
+          <a:p>
+            <a:pPr algn="l"/>
+            <a:r>
+              <a:rPr sz="1050" b="0" i="0">
+                <a:solidFill>
+                  <a:srgbClr val="1B2A41"/>
+                </a:solidFill>
+                <a:latin typeface="Menlo"/>
+              </a:rPr>
+              <a:t>signed_by     : hsm-registry-root</a:t>
+            </a:r>
+          </a:p>
+        </p:txBody>
+      </p:sp>
+      <p:sp>
+        <p:nvSpPr>
+          <p:cNvPr id="8" name="TextBox 7"/>
+          <p:cNvSpPr txBox="1"/>
+          <p:nvPr/>
+        </p:nvSpPr>
+        <p:spPr>
+          <a:xfrm>
+            <a:off x="658368" y="2423159"/>
+            <a:ext cx="5486400" cy="237744"/>
+          </a:xfrm>
+          <a:prstGeom prst="rect">
+            <a:avLst/>
+          </a:prstGeom>
+          <a:noFill/>
+        </p:spPr>
+        <p:txBody>
+          <a:bodyPr wrap="square">
+            <a:spAutoFit/>
+          </a:bodyPr>
+          <a:lstStyle/>
+          <a:p>
+            <a:pPr algn="l"/>
+            <a:r>
+              <a:rPr sz="1050" b="0" i="0">
+                <a:solidFill>
+                  <a:srgbClr val="1B2A41"/>
+                </a:solidFill>
+                <a:latin typeface="Menlo"/>
+              </a:rPr>
+              <a:t>sig           : ed25519:2f90…c6d3</a:t>
+            </a:r>
+          </a:p>
+        </p:txBody>
+      </p:sp>
+      <p:sp>
+        <p:nvSpPr>
+          <p:cNvPr id="9" name="TextBox 8"/>
+          <p:cNvSpPr txBox="1"/>
+          <p:nvPr/>
+        </p:nvSpPr>
+        <p:spPr>
+          <a:xfrm>
+            <a:off x="658368" y="2660903"/>
+            <a:ext cx="5486400" cy="237744"/>
+          </a:xfrm>
+          <a:prstGeom prst="rect">
+            <a:avLst/>
+          </a:prstGeom>
+          <a:noFill/>
+        </p:spPr>
+        <p:txBody>
+          <a:bodyPr wrap="square">
+            <a:spAutoFit/>
+          </a:bodyPr>
+          <a:lstStyle/>
+          <a:p>
+            <a:pPr algn="l"/>
+            <a:r>
+              <a:rPr sz="1050" b="0" i="0">
+                <a:solidFill>
+                  <a:srgbClr val="1B2A41"/>
+                </a:solidFill>
+                <a:latin typeface="Menlo"/>
+              </a:rPr>
+              <a:t>──────────────────────────────────</a:t>
+            </a:r>
+          </a:p>
+        </p:txBody>
+      </p:sp>
+      <p:sp>
+        <p:nvSpPr>
+          <p:cNvPr id="10" name="TextBox 9"/>
+          <p:cNvSpPr txBox="1"/>
+          <p:nvPr/>
+        </p:nvSpPr>
+        <p:spPr>
+          <a:xfrm>
+            <a:off x="658368" y="2898647"/>
+            <a:ext cx="5486400" cy="237744"/>
+          </a:xfrm>
+          <a:prstGeom prst="rect">
+            <a:avLst/>
+          </a:prstGeom>
+          <a:noFill/>
+        </p:spPr>
+        <p:txBody>
+          <a:bodyPr wrap="square">
+            <a:spAutoFit/>
+          </a:bodyPr>
+          <a:lstStyle/>
+          <a:p>
+            <a:pPr algn="l"/>
+            <a:r>
+              <a:rPr sz="1050" b="0" i="0">
+                <a:solidFill>
+                  <a:srgbClr val="C99A2E"/>
+                </a:solidFill>
+                <a:latin typeface="Menlo"/>
+              </a:rPr>
+              <a:t>ikm-2025-Q2-07 : valid 2025-04-01 → 2025-06-30</a:t>
+            </a:r>
+          </a:p>
+        </p:txBody>
+      </p:sp>
+      <p:sp>
+        <p:nvSpPr>
+          <p:cNvPr id="11" name="TextBox 10"/>
+          <p:cNvSpPr txBox="1"/>
+          <p:nvPr/>
+        </p:nvSpPr>
+        <p:spPr>
+          <a:xfrm>
+            <a:off x="658368" y="3136391"/>
+            <a:ext cx="5486400" cy="237744"/>
+          </a:xfrm>
+          <a:prstGeom prst="rect">
+            <a:avLst/>
+          </a:prstGeom>
+          <a:noFill/>
+        </p:spPr>
+        <p:txBody>
+          <a:bodyPr wrap="square">
+            <a:spAutoFit/>
+          </a:bodyPr>
+          <a:lstStyle/>
+          <a:p>
+            <a:pPr algn="l"/>
+            <a:r>
+              <a:rPr sz="1050" b="0" i="0">
+                <a:solidFill>
+                  <a:srgbClr val="0E7C7B"/>
+                </a:solidFill>
+                <a:latin typeface="Menlo"/>
+              </a:rPr>
+              <a:t>hsm-seal-01    : valid 2024-11-15 → present</a:t>
+            </a:r>
+          </a:p>
+        </p:txBody>
+      </p:sp>
+      <p:sp>
+        <p:nvSpPr>
+          <p:cNvPr id="12" name="TextBox 11"/>
+          <p:cNvSpPr txBox="1"/>
+          <p:nvPr/>
+        </p:nvSpPr>
+        <p:spPr>
+          <a:xfrm>
+            <a:off x="658368" y="3374135"/>
+            <a:ext cx="5486400" cy="237744"/>
+          </a:xfrm>
+          <a:prstGeom prst="rect">
+            <a:avLst/>
+          </a:prstGeom>
+          <a:noFill/>
+        </p:spPr>
+        <p:txBody>
+          <a:bodyPr wrap="square">
+            <a:spAutoFit/>
+          </a:bodyPr>
+          <a:lstStyle/>
+          <a:p>
+            <a:pPr algn="l"/>
+            <a:r>
+              <a:rPr sz="1050" b="0" i="0">
+                <a:solidFill>
+                  <a:srgbClr val="1B2A41"/>
+                </a:solidFill>
+                <a:latin typeface="Menlo"/>
+              </a:rPr>
+              <a:t>  fingerprint  : f7:2a:…:9c</a:t>
+            </a:r>
+          </a:p>
+        </p:txBody>
+      </p:sp>
+      <p:sp>
+        <p:nvSpPr>
+          <p:cNvPr id="13" name="TextBox 12"/>
+          <p:cNvSpPr txBox="1"/>
+          <p:nvPr/>
+        </p:nvSpPr>
+        <p:spPr>
+          <a:xfrm>
+            <a:off x="658368" y="3611879"/>
+            <a:ext cx="5486400" cy="237744"/>
+          </a:xfrm>
+          <a:prstGeom prst="rect">
+            <a:avLst/>
+          </a:prstGeom>
+          <a:noFill/>
+        </p:spPr>
+        <p:txBody>
+          <a:bodyPr wrap="square">
+            <a:spAutoFit/>
+          </a:bodyPr>
+          <a:lstStyle/>
+          <a:p>
+            <a:pPr algn="l"/>
+            <a:r>
+              <a:rPr sz="1050" b="0" i="0">
+                <a:solidFill>
+                  <a:srgbClr val="B32D2D"/>
+                </a:solidFill>
+                <a:latin typeface="Menlo"/>
+              </a:rPr>
+              <a:t>roles          : registry-root ≠ seal-requester</a:t>
+            </a:r>
+          </a:p>
+        </p:txBody>
+      </p:sp>
+      <p:sp>
+        <p:nvSpPr>
+          <p:cNvPr id="14" name="TextBox 13"/>
+          <p:cNvSpPr txBox="1"/>
+          <p:nvPr/>
+        </p:nvSpPr>
+        <p:spPr>
+          <a:xfrm>
+            <a:off x="6583680" y="1737360"/>
+            <a:ext cx="5120640" cy="3474720"/>
+          </a:xfrm>
+          <a:prstGeom prst="rect">
+            <a:avLst/>
+          </a:prstGeom>
+          <a:noFill/>
+        </p:spPr>
+        <p:txBody>
+          <a:bodyPr wrap="square">
+            <a:spAutoFit/>
+          </a:bodyPr>
+          <a:lstStyle/>
+          <a:p>
+            <a:pPr algn="l"/>
+            <a:r>
+              <a:rPr sz="1350" b="0" i="0">
+                <a:solidFill>
+                  <a:srgbClr val="1B2A41"/>
+                </a:solidFill>
                 <a:latin typeface="Avenir Next"/>
               </a:rPr>
-              <a:t>The role that holds the manifest's signing authority cannot request seals and cannot extract keys —</a:t>
-            </a:r>
-          </a:p>
-          <a:p>
-            <a:pPr algn="l"/>
-            <a:r>
-              <a:rPr sz="1500" b="0" i="0">
+              <a:t>Entry keys (ikm-*) and the seal signer</a:t>
+            </a:r>
+          </a:p>
+          <a:p>
+            <a:pPr algn="l"/>
+            <a:r>
+              <a:rPr sz="1350" b="0" i="0">
                 <a:solidFill>
                   <a:srgbClr val="1B2A41"/>
                 </a:solidFill>
                 <a:latin typeface="Avenir Next"/>
               </a:rPr>
-              <a:t>separation of duties enforced by hardware custody, not by policy documents.</a:t>
+              <a:t>(hsm-seal-01) are vouched WITH validity</a:t>
+            </a:r>
+          </a:p>
+          <a:p>
+            <a:pPr algn="l"/>
+            <a:r>
+              <a:rPr sz="1350" b="0" i="0">
+                <a:solidFill>
+                  <a:srgbClr val="1B2A41"/>
+                </a:solidFill>
+                <a:latin typeface="Avenir Next"/>
+              </a:rPr>
+              <a:t>windows — a signature only counts if its key</a:t>
+            </a:r>
+          </a:p>
+          <a:p>
+            <a:pPr algn="l"/>
+            <a:r>
+              <a:rPr sz="1350" b="0" i="0">
+                <a:solidFill>
+                  <a:srgbClr val="1B2A41"/>
+                </a:solidFill>
+                <a:latin typeface="Avenir Next"/>
+              </a:rPr>
+              <a:t>was valid on the date it claims.</a:t>
+            </a:r>
+          </a:p>
+          <a:p>
+            <a:pPr algn="l"/>
+          </a:p>
+          <a:p>
+            <a:pPr algn="l"/>
+            <a:r>
+              <a:rPr sz="1350" b="0" i="0">
+                <a:solidFill>
+                  <a:srgbClr val="1B2A41"/>
+                </a:solidFill>
+                <a:latin typeface="Avenir Next"/>
+              </a:rPr>
+              <a:t>An examiner reconciles the fingerprint</a:t>
+            </a:r>
+          </a:p>
+          <a:p>
+            <a:pPr algn="l"/>
+            <a:r>
+              <a:rPr sz="1350" b="0" i="0">
+                <a:solidFill>
+                  <a:srgbClr val="1B2A41"/>
+                </a:solidFill>
+                <a:latin typeface="Avenir Next"/>
+              </a:rPr>
+              <a:t>against a published root with their own</a:t>
+            </a:r>
+          </a:p>
+          <a:p>
+            <a:pPr algn="l"/>
+            <a:r>
+              <a:rPr sz="1350" b="0" i="0">
+                <a:solidFill>
+                  <a:srgbClr val="1B2A41"/>
+                </a:solidFill>
+                <a:latin typeface="Avenir Next"/>
+              </a:rPr>
+              <a:t>tooling — no bank software in the loop.</a:t>
+            </a:r>
+          </a:p>
+          <a:p>
+            <a:pPr algn="l"/>
+          </a:p>
+          <a:p>
+            <a:pPr algn="l"/>
+            <a:r>
+              <a:rPr sz="1350" b="0" i="0">
+                <a:solidFill>
+                  <a:srgbClr val="1B2A41"/>
+                </a:solidFill>
+                <a:latin typeface="Avenir Next"/>
+              </a:rPr>
+              <a:t>The role holding the registry root cannot</a:t>
+            </a:r>
+          </a:p>
+          <a:p>
+            <a:pPr algn="l"/>
+            <a:r>
+              <a:rPr sz="1350" b="0" i="0">
+                <a:solidFill>
+                  <a:srgbClr val="1B2A41"/>
+                </a:solidFill>
+                <a:latin typeface="Avenir Next"/>
+              </a:rPr>
+              <a:t>request seals and cannot extract keys —</a:t>
+            </a:r>
+          </a:p>
+          <a:p>
+            <a:pPr algn="l"/>
+            <a:r>
+              <a:rPr sz="1350" b="0" i="0">
+                <a:solidFill>
+                  <a:srgbClr val="1B2A41"/>
+                </a:solidFill>
+                <a:latin typeface="Avenir Next"/>
+              </a:rPr>
+              <a:t>separation enforced by hardware custody.</a:t>
             </a:r>
           </a:p>
         </p:txBody>
@@ -6521,8 +8448,8 @@
         </p:nvSpPr>
         <p:spPr>
           <a:xfrm>
-            <a:off x="548640" y="320040"/>
-            <a:ext cx="11064240" cy="822960"/>
+            <a:off x="548640" y="274320"/>
+            <a:ext cx="11064240" cy="731520"/>
           </a:xfrm>
           <a:prstGeom prst="rect">
             <a:avLst/>
@@ -6537,7 +8464,7 @@
           <a:p>
             <a:pPr algn="l"/>
             <a:r>
-              <a:rPr sz="3000" b="1" i="0">
+              <a:rPr sz="2800" b="1" i="0">
                 <a:solidFill>
                   <a:srgbClr val="1B2A41"/>
                 </a:solidFill>
@@ -6556,7 +8483,7 @@
         </p:nvSpPr>
         <p:spPr>
           <a:xfrm>
-            <a:off x="548640" y="960120"/>
+            <a:off x="548640" y="868680"/>
             <a:ext cx="11064240" cy="457200"/>
           </a:xfrm>
           <a:prstGeom prst="rect">
@@ -6572,13 +8499,13 @@
           <a:p>
             <a:pPr algn="l"/>
             <a:r>
-              <a:rPr sz="1500" b="0" i="1">
+              <a:rPr sz="1400" b="0" i="1">
                 <a:solidFill>
                   <a:srgbClr val="6B7480"/>
                 </a:solidFill>
                 <a:latin typeface="Avenir Next"/>
               </a:rPr>
-              <a:t>One digit in a loan balance from last spring</a:t>
+              <a:t>One digit in a loan balance from last spring ($214,309 → $214,809)</a:t>
             </a:r>
           </a:p>
         </p:txBody>
@@ -6591,8 +8518,8 @@
         </p:nvSpPr>
         <p:spPr>
           <a:xfrm>
-            <a:off x="731520" y="1554480"/>
-            <a:ext cx="502920" cy="502920"/>
+            <a:off x="731520" y="1508760"/>
+            <a:ext cx="457200" cy="457200"/>
           </a:xfrm>
           <a:prstGeom prst="roundRect">
             <a:avLst/>
@@ -6630,7 +8557,6 @@
                 <a:solidFill>
                   <a:srgbClr val="FAF7F0"/>
                 </a:solidFill>
-                <a:latin typeface="Avenir Next"/>
               </a:rPr>
               <a:t>1</a:t>
             </a:r>
@@ -6645,8 +8571,8 @@
         </p:nvSpPr>
         <p:spPr>
           <a:xfrm>
-            <a:off x="1417320" y="1508760"/>
-            <a:ext cx="3931920" cy="548640"/>
+            <a:off x="1371600" y="1463039"/>
+            <a:ext cx="3291840" cy="548640"/>
           </a:xfrm>
           <a:prstGeom prst="rect">
             <a:avLst/>
@@ -6661,13 +8587,13 @@
           <a:p>
             <a:pPr algn="l"/>
             <a:r>
-              <a:rPr sz="1500" b="1" i="0">
+              <a:rPr sz="1450" b="1" i="0">
                 <a:solidFill>
                   <a:srgbClr val="1B2A41"/>
                 </a:solidFill>
                 <a:latin typeface="Avenir Next"/>
               </a:rPr>
-              <a:t>Alter one digit in the artifact</a:t>
+              <a:t>Alter the artifact</a:t>
             </a:r>
           </a:p>
         </p:txBody>
@@ -6680,8 +8606,8 @@
         </p:nvSpPr>
         <p:spPr>
           <a:xfrm>
-            <a:off x="5486400" y="1508760"/>
-            <a:ext cx="6400800" cy="777240"/>
+            <a:off x="4754880" y="1463039"/>
+            <a:ext cx="7132320" cy="868680"/>
           </a:xfrm>
           <a:prstGeom prst="rect">
             <a:avLst/>
@@ -6696,13 +8622,13 @@
           <a:p>
             <a:pPr algn="l"/>
             <a:r>
-              <a:rPr sz="1300" b="0" i="0">
+              <a:rPr sz="1200" b="0" i="0">
                 <a:solidFill>
                   <a:srgbClr val="6B7480"/>
                 </a:solidFill>
-                <a:latin typeface="Avenir Next"/>
-              </a:rPr>
-              <a:t>its keyed hash stops recomputing</a:t>
+                <a:latin typeface="Menlo"/>
+              </a:rPr>
+              <a:t>sha256 changes → entry 0412's artifact_hash no longer matches; its mac stops recomputing</a:t>
             </a:r>
           </a:p>
         </p:txBody>
@@ -6715,8 +8641,8 @@
         </p:nvSpPr>
         <p:spPr>
           <a:xfrm>
-            <a:off x="731520" y="2395728"/>
-            <a:ext cx="502920" cy="502920"/>
+            <a:off x="731520" y="2377439"/>
+            <a:ext cx="457200" cy="457200"/>
           </a:xfrm>
           <a:prstGeom prst="roundRect">
             <a:avLst/>
@@ -6754,7 +8680,6 @@
                 <a:solidFill>
                   <a:srgbClr val="FAF7F0"/>
                 </a:solidFill>
-                <a:latin typeface="Avenir Next"/>
               </a:rPr>
               <a:t>2</a:t>
             </a:r>
@@ -6769,8 +8694,8 @@
         </p:nvSpPr>
         <p:spPr>
           <a:xfrm>
-            <a:off x="1417320" y="2350008"/>
-            <a:ext cx="3931920" cy="548640"/>
+            <a:off x="1371600" y="2331720"/>
+            <a:ext cx="3291840" cy="548640"/>
           </a:xfrm>
           <a:prstGeom prst="rect">
             <a:avLst/>
@@ -6785,13 +8710,13 @@
           <a:p>
             <a:pPr algn="l"/>
             <a:r>
-              <a:rPr sz="1500" b="1" i="0">
+              <a:rPr sz="1450" b="1" i="0">
                 <a:solidFill>
                   <a:srgbClr val="1B2A41"/>
                 </a:solidFill>
                 <a:latin typeface="Avenir Next"/>
               </a:rPr>
-              <a:t>Fix that hash</a:t>
+              <a:t>Fix 0412's mac</a:t>
             </a:r>
           </a:p>
         </p:txBody>
@@ -6804,8 +8729,8 @@
         </p:nvSpPr>
         <p:spPr>
           <a:xfrm>
-            <a:off x="5486400" y="2350008"/>
-            <a:ext cx="6400800" cy="777240"/>
+            <a:off x="4754880" y="2331720"/>
+            <a:ext cx="7132320" cy="868680"/>
           </a:xfrm>
           <a:prstGeom prst="rect">
             <a:avLst/>
@@ -6820,13 +8745,13 @@
           <a:p>
             <a:pPr algn="l"/>
             <a:r>
-              <a:rPr sz="1300" b="0" i="0">
+              <a:rPr sz="1200" b="0" i="0">
                 <a:solidFill>
                   <a:srgbClr val="6B7480"/>
                 </a:solidFill>
-                <a:latin typeface="Avenir Next"/>
-              </a:rPr>
-              <a:t>the NEXT entry's link is wrong — it pointed at the old hash</a:t>
+                <a:latin typeface="Menlo"/>
+              </a:rPr>
+              <a:t>entry 0413's prev_entry_mac (b44a…91c7) is now wrong — it pointed at the OLD mac</a:t>
             </a:r>
           </a:p>
         </p:txBody>
@@ -6839,8 +8764,8 @@
         </p:nvSpPr>
         <p:spPr>
           <a:xfrm>
-            <a:off x="731520" y="3236976"/>
-            <a:ext cx="502920" cy="502920"/>
+            <a:off x="731520" y="3246120"/>
+            <a:ext cx="457200" cy="457200"/>
           </a:xfrm>
           <a:prstGeom prst="roundRect">
             <a:avLst/>
@@ -6878,7 +8803,6 @@
                 <a:solidFill>
                   <a:srgbClr val="FAF7F0"/>
                 </a:solidFill>
-                <a:latin typeface="Avenir Next"/>
               </a:rPr>
               <a:t>3</a:t>
             </a:r>
@@ -6893,8 +8817,8 @@
         </p:nvSpPr>
         <p:spPr>
           <a:xfrm>
-            <a:off x="1417320" y="3191256"/>
-            <a:ext cx="3931920" cy="548640"/>
+            <a:off x="1371600" y="3200400"/>
+            <a:ext cx="3291840" cy="548640"/>
           </a:xfrm>
           <a:prstGeom prst="rect">
             <a:avLst/>
@@ -6909,13 +8833,13 @@
           <a:p>
             <a:pPr algn="l"/>
             <a:r>
-              <a:rPr sz="1500" b="1" i="0">
+              <a:rPr sz="1450" b="1" i="0">
                 <a:solidFill>
                   <a:srgbClr val="1B2A41"/>
                 </a:solidFill>
                 <a:latin typeface="Avenir Next"/>
               </a:rPr>
-              <a:t>Fix that one</a:t>
+              <a:t>Fix 0413, then 0414…</a:t>
             </a:r>
           </a:p>
         </p:txBody>
@@ -6928,8 +8852,8 @@
         </p:nvSpPr>
         <p:spPr>
           <a:xfrm>
-            <a:off x="5486400" y="3191256"/>
-            <a:ext cx="6400800" cy="777240"/>
+            <a:off x="4754880" y="3200400"/>
+            <a:ext cx="7132320" cy="868680"/>
           </a:xfrm>
           <a:prstGeom prst="rect">
             <a:avLst/>
@@ -6944,13 +8868,13 @@
           <a:p>
             <a:pPr algn="l"/>
             <a:r>
-              <a:rPr sz="1300" b="0" i="0">
+              <a:rPr sz="1200" b="0" i="0">
                 <a:solidFill>
                   <a:srgbClr val="6B7480"/>
                 </a:solidFill>
-                <a:latin typeface="Avenir Next"/>
-              </a:rPr>
-              <a:t>the next breaks. Re-derive the entire tail from the change forward</a:t>
+                <a:latin typeface="Menlo"/>
+              </a:rPr>
+              <a:t>re-derive the ENTIRE tail from the point of change forward</a:t>
             </a:r>
           </a:p>
         </p:txBody>
@@ -6963,8 +8887,8 @@
         </p:nvSpPr>
         <p:spPr>
           <a:xfrm>
-            <a:off x="731520" y="4078224"/>
-            <a:ext cx="502920" cy="502920"/>
+            <a:off x="731520" y="4114800"/>
+            <a:ext cx="457200" cy="457200"/>
           </a:xfrm>
           <a:prstGeom prst="roundRect">
             <a:avLst/>
@@ -7002,7 +8926,6 @@
                 <a:solidFill>
                   <a:srgbClr val="FAF7F0"/>
                 </a:solidFill>
-                <a:latin typeface="Avenir Next"/>
               </a:rPr>
               <a:t>4</a:t>
             </a:r>
@@ -7017,8 +8940,8 @@
         </p:nvSpPr>
         <p:spPr>
           <a:xfrm>
-            <a:off x="1417320" y="4032504"/>
-            <a:ext cx="3931920" cy="548640"/>
+            <a:off x="1371600" y="4069080"/>
+            <a:ext cx="3291840" cy="548640"/>
           </a:xfrm>
           <a:prstGeom prst="rect">
             <a:avLst/>
@@ -7033,13 +8956,13 @@
           <a:p>
             <a:pPr algn="l"/>
             <a:r>
-              <a:rPr sz="1500" b="1" i="0">
+              <a:rPr sz="1450" b="1" i="0">
                 <a:solidFill>
                   <a:srgbClr val="B32D2D"/>
                 </a:solidFill>
                 <a:latin typeface="Avenir Next"/>
               </a:rPr>
-              <a:t>Now the daily root differs</a:t>
+              <a:t>Day root differs</a:t>
             </a:r>
           </a:p>
         </p:txBody>
@@ -7052,8 +8975,8 @@
         </p:nvSpPr>
         <p:spPr>
           <a:xfrm>
-            <a:off x="5486400" y="4032504"/>
-            <a:ext cx="6400800" cy="777240"/>
+            <a:off x="4754880" y="4069080"/>
+            <a:ext cx="7132320" cy="868680"/>
           </a:xfrm>
           <a:prstGeom prst="rect">
             <a:avLst/>
@@ -7068,25 +8991,25 @@
           <a:p>
             <a:pPr algn="l"/>
             <a:r>
-              <a:rPr sz="1300" b="0" i="0">
+              <a:rPr sz="1200" b="0" i="0">
                 <a:solidFill>
                   <a:srgbClr val="6B7480"/>
                 </a:solidFill>
-                <a:latin typeface="Avenir Next"/>
-              </a:rPr>
-              <a:t>but the original root was signed and PUBLISHED a year ago,</a:t>
-            </a:r>
-          </a:p>
-          <a:p>
-            <a:pPr algn="l"/>
-            <a:r>
-              <a:rPr sz="1300" b="0" i="0">
+                <a:latin typeface="Menlo"/>
+              </a:rPr>
+              <a:t>recomputed root ≠ 6a3f…d208 — but S-2025-05-23 was signed and PUBLISHED a year ago,</a:t>
+            </a:r>
+          </a:p>
+          <a:p>
+            <a:pPr algn="l"/>
+            <a:r>
+              <a:rPr sz="1200" b="0" i="0">
                 <a:solidFill>
                   <a:srgbClr val="6B7480"/>
                 </a:solidFill>
-                <a:latin typeface="Avenir Next"/>
-              </a:rPr>
-              <a:t>somewhere your account can't reach</a:t>
+                <a:latin typeface="Menlo"/>
+              </a:rPr>
+              <a:t>in a place your account can't reach</a:t>
             </a:r>
           </a:p>
         </p:txBody>
@@ -7099,8 +9022,8 @@
         </p:nvSpPr>
         <p:spPr>
           <a:xfrm>
-            <a:off x="731520" y="4919472"/>
-            <a:ext cx="502920" cy="502920"/>
+            <a:off x="731520" y="4983480"/>
+            <a:ext cx="457200" cy="457200"/>
           </a:xfrm>
           <a:prstGeom prst="roundRect">
             <a:avLst/>
@@ -7138,7 +9061,6 @@
                 <a:solidFill>
                   <a:srgbClr val="FAF7F0"/>
                 </a:solidFill>
-                <a:latin typeface="Avenir Next"/>
               </a:rPr>
               <a:t>5</a:t>
             </a:r>
@@ -7153,8 +9075,8 @@
         </p:nvSpPr>
         <p:spPr>
           <a:xfrm>
-            <a:off x="1417320" y="4873752"/>
-            <a:ext cx="3931920" cy="548640"/>
+            <a:off x="1371600" y="4937760"/>
+            <a:ext cx="3291840" cy="548640"/>
           </a:xfrm>
           <a:prstGeom prst="rect">
             <a:avLst/>
@@ -7169,13 +9091,13 @@
           <a:p>
             <a:pPr algn="l"/>
             <a:r>
-              <a:rPr sz="1500" b="1" i="0">
+              <a:rPr sz="1450" b="1" i="0">
                 <a:solidFill>
                   <a:srgbClr val="B32D2D"/>
                 </a:solidFill>
                 <a:latin typeface="Avenir Next"/>
               </a:rPr>
-              <a:t>Forge the historical seal?</a:t>
+              <a:t>Forge the seal?</a:t>
             </a:r>
           </a:p>
         </p:txBody>
@@ -7188,8 +9110,8 @@
         </p:nvSpPr>
         <p:spPr>
           <a:xfrm>
-            <a:off x="5486400" y="4873752"/>
-            <a:ext cx="6400800" cy="777240"/>
+            <a:off x="4754880" y="4937760"/>
+            <a:ext cx="7132320" cy="868680"/>
           </a:xfrm>
           <a:prstGeom prst="rect">
             <a:avLst/>
@@ -7204,13 +9126,13 @@
           <a:p>
             <a:pPr algn="l"/>
             <a:r>
-              <a:rPr sz="1300" b="0" i="0">
+              <a:rPr sz="1200" b="0" i="0">
                 <a:solidFill>
                   <a:srgbClr val="6B7480"/>
                 </a:solidFill>
-                <a:latin typeface="Avenir Next"/>
-              </a:rPr>
-              <a:t>you need a signing key the published manifest vouches for ON THAT DATE</a:t>
+                <a:latin typeface="Menlo"/>
+              </a:rPr>
+              <a:t>you need a signing key the manifest vouches for ON 2025-05-23 (hsm-seal-01's window)</a:t>
             </a:r>
           </a:p>
         </p:txBody>
@@ -7223,8 +9145,8 @@
         </p:nvSpPr>
         <p:spPr>
           <a:xfrm>
-            <a:off x="731520" y="5760720"/>
-            <a:ext cx="502920" cy="502920"/>
+            <a:off x="731520" y="5852160"/>
+            <a:ext cx="457200" cy="457200"/>
           </a:xfrm>
           <a:prstGeom prst="roundRect">
             <a:avLst/>
@@ -7262,7 +9184,6 @@
                 <a:solidFill>
                   <a:srgbClr val="FAF7F0"/>
                 </a:solidFill>
-                <a:latin typeface="Avenir Next"/>
               </a:rPr>
               <a:t>6</a:t>
             </a:r>
@@ -7277,8 +9198,8 @@
         </p:nvSpPr>
         <p:spPr>
           <a:xfrm>
-            <a:off x="1417320" y="5715000"/>
-            <a:ext cx="3931920" cy="548640"/>
+            <a:off x="1371600" y="5806440"/>
+            <a:ext cx="3291840" cy="548640"/>
           </a:xfrm>
           <a:prstGeom prst="rect">
             <a:avLst/>
@@ -7293,13 +9214,13 @@
           <a:p>
             <a:pPr algn="l"/>
             <a:r>
-              <a:rPr sz="1500" b="1" i="0">
+              <a:rPr sz="1450" b="1" i="0">
                 <a:solidFill>
                   <a:srgbClr val="B32D2D"/>
                 </a:solidFill>
                 <a:latin typeface="Avenir Next"/>
               </a:rPr>
-              <a:t>Forge the manifest signature?</a:t>
+              <a:t>Forge the manifest?</a:t>
             </a:r>
           </a:p>
         </p:txBody>
@@ -7312,8 +9233,8 @@
         </p:nvSpPr>
         <p:spPr>
           <a:xfrm>
-            <a:off x="5486400" y="5715000"/>
-            <a:ext cx="6400800" cy="777240"/>
+            <a:off x="4754880" y="5806440"/>
+            <a:ext cx="7132320" cy="868680"/>
           </a:xfrm>
           <a:prstGeom prst="rect">
             <a:avLst/>
@@ -7328,11 +9249,11 @@
           <a:p>
             <a:pPr algn="l"/>
             <a:r>
-              <a:rPr sz="1300" b="0" i="0">
+              <a:rPr sz="1200" b="0" i="0">
                 <a:solidFill>
                   <a:srgbClr val="6B7480"/>
                 </a:solidFill>
-                <a:latin typeface="Avenir Next"/>
+                <a:latin typeface="Menlo"/>
               </a:rPr>
               <a:t>its root is held by the one role that can't request seals and can't extract keys</a:t>
             </a:r>
@@ -7469,8 +9390,8 @@
         </p:nvSpPr>
         <p:spPr>
           <a:xfrm>
-            <a:off x="548640" y="320040"/>
-            <a:ext cx="11064240" cy="822960"/>
+            <a:off x="548640" y="274320"/>
+            <a:ext cx="11064240" cy="731520"/>
           </a:xfrm>
           <a:prstGeom prst="rect">
             <a:avLst/>
@@ -7485,7 +9406,7 @@
           <a:p>
             <a:pPr algn="l"/>
             <a:r>
-              <a:rPr sz="3000" b="1" i="0">
+              <a:rPr sz="2800" b="1" i="0">
                 <a:solidFill>
                   <a:srgbClr val="1B2A41"/>
                 </a:solidFill>
@@ -7504,7 +9425,7 @@
         </p:nvSpPr>
         <p:spPr>
           <a:xfrm>
-            <a:off x="548640" y="960120"/>
+            <a:off x="548640" y="868680"/>
             <a:ext cx="11064240" cy="457200"/>
           </a:xfrm>
           <a:prstGeom prst="rect">
@@ -7520,7 +9441,7 @@
           <a:p>
             <a:pPr algn="l"/>
             <a:r>
-              <a:rPr sz="1500" b="0" i="1">
+              <a:rPr sz="1400" b="0" i="1">
                 <a:solidFill>
                   <a:srgbClr val="6B7480"/>
                 </a:solidFill>
@@ -7578,7 +9499,6 @@
                 <a:solidFill>
                   <a:srgbClr val="FAF7F0"/>
                 </a:solidFill>
-                <a:latin typeface="Avenir Next"/>
               </a:rPr>
               <a:t>Per-event MAC</a:t>
             </a:r>
@@ -7628,11 +9548,10 @@
           <a:p>
             <a:pPr algn="ctr"/>
             <a:r>
-              <a:rPr sz="1300" b="0">
+              <a:rPr sz="1300">
                 <a:solidFill>
                   <a:srgbClr val="1B2A41"/>
                 </a:solidFill>
-                <a:latin typeface="Avenir Next"/>
               </a:rPr>
               <a:t>re-forging every keyed hash</a:t>
             </a:r>
@@ -7640,25 +9559,23 @@
           <a:p>
             <a:pPr algn="ctr"/>
             <a:r>
-              <a:rPr sz="1300" b="0">
+              <a:rPr sz="1300">
                 <a:solidFill>
                   <a:srgbClr val="1B2A41"/>
                 </a:solidFill>
-                <a:latin typeface="Avenir Next"/>
-              </a:rPr>
-              <a:t>in the altered tail</a:t>
+              </a:rPr>
+              <a:t>in the altered tail requires</a:t>
             </a:r>
           </a:p>
           <a:p>
             <a:pPr algn="ctr"/>
             <a:r>
-              <a:rPr sz="1300" b="0">
+              <a:rPr sz="1300">
                 <a:solidFill>
                   <a:srgbClr val="1B2A41"/>
                 </a:solidFill>
-                <a:latin typeface="Avenir Next"/>
-              </a:rPr>
-              <a:t>requires the event keys</a:t>
+              </a:rPr>
+              <a:t>the event keys (ikm-*)</a:t>
             </a:r>
           </a:p>
         </p:txBody>
@@ -7710,7 +9627,6 @@
                 <a:solidFill>
                   <a:srgbClr val="FAF7F0"/>
                 </a:solidFill>
-                <a:latin typeface="Avenir Next"/>
               </a:rPr>
               <a:t>Published daily seal</a:t>
             </a:r>
@@ -7760,23 +9676,21 @@
           <a:p>
             <a:pPr algn="ctr"/>
             <a:r>
-              <a:rPr sz="1300" b="0">
+              <a:rPr sz="1300">
                 <a:solidFill>
                   <a:srgbClr val="1B2A41"/>
                 </a:solidFill>
-                <a:latin typeface="Avenir Next"/>
-              </a:rPr>
-              <a:t>the historical root is signed</a:t>
+              </a:rPr>
+              <a:t>S-2025-05-23's root is signed</a:t>
             </a:r>
           </a:p>
           <a:p>
             <a:pPr algn="ctr"/>
             <a:r>
-              <a:rPr sz="1300" b="0">
+              <a:rPr sz="1300">
                 <a:solidFill>
                   <a:srgbClr val="1B2A41"/>
                 </a:solidFill>
-                <a:latin typeface="Avenir Next"/>
               </a:rPr>
               <a:t>and held OUTSIDE the</a:t>
             </a:r>
@@ -7784,11 +9698,10 @@
           <a:p>
             <a:pPr algn="ctr"/>
             <a:r>
-              <a:rPr sz="1300" b="0">
+              <a:rPr sz="1300">
                 <a:solidFill>
                   <a:srgbClr val="1B2A41"/>
                 </a:solidFill>
-                <a:latin typeface="Avenir Next"/>
               </a:rPr>
               <a:t>institution's reach</a:t>
             </a:r>
@@ -7842,7 +9755,6 @@
                 <a:solidFill>
                   <a:srgbClr val="FAF7F0"/>
                 </a:solidFill>
-                <a:latin typeface="Avenir Next"/>
               </a:rPr>
               <a:t>Manifest signature</a:t>
             </a:r>
@@ -7892,11 +9804,10 @@
           <a:p>
             <a:pPr algn="ctr"/>
             <a:r>
-              <a:rPr sz="1300" b="0">
+              <a:rPr sz="1300">
                 <a:solidFill>
                   <a:srgbClr val="1B2A41"/>
                 </a:solidFill>
-                <a:latin typeface="Avenir Next"/>
               </a:rPr>
               <a:t>key custody separated by role</a:t>
             </a:r>
@@ -7904,11 +9815,10 @@
           <a:p>
             <a:pPr algn="ctr"/>
             <a:r>
-              <a:rPr sz="1300" b="0">
+              <a:rPr sz="1300">
                 <a:solidFill>
                   <a:srgbClr val="1B2A41"/>
                 </a:solidFill>
-                <a:latin typeface="Avenir Next"/>
               </a:rPr>
               <a:t>and hardware — the signer</a:t>
             </a:r>
@@ -7916,11 +9826,10 @@
           <a:p>
             <a:pPr algn="ctr"/>
             <a:r>
-              <a:rPr sz="1300" b="0">
+              <a:rPr sz="1300">
                 <a:solidFill>
                   <a:srgbClr val="1B2A41"/>
                 </a:solidFill>
-                <a:latin typeface="Avenir Next"/>
               </a:rPr>
               <a:t>can't be asked to cooperate</a:t>
             </a:r>

--- a/diagrams/compliance/merkle-seal-chain.pptx
+++ b/diagrams/compliance/merkle-seal-chain.pptx
@@ -3397,6 +3397,18 @@
                 <a:latin typeface="Avenir Next"/>
               </a:rPr>
               <a:t>    §10.84 — ordering proofs (a later event binds the hash of an earlier, already-sealed event)</a:t>
+            </a:r>
+          </a:p>
+          <a:p>
+            <a:pPr algn="l"/>
+            <a:r>
+              <a:rPr sz="1500" b="0" i="0">
+                <a:solidFill>
+                  <a:srgbClr val="1B2A41"/>
+                </a:solidFill>
+                <a:latin typeface="Avenir Next"/>
+              </a:rPr>
+              <a:t>    §10.85 — artifact retrieval index: digest→bytes resolution without estate re-hashing</a:t>
             </a:r>
           </a:p>
           <a:p>
